--- a/other/drafts/no.13-agentic-internet/image/AgenticInternet図.pptx
+++ b/other/drafts/no.13-agentic-internet/image/AgenticInternet図.pptx
@@ -9,7 +9,7 @@
     <p:sldId id="257" r:id="rId8"/>
     <p:sldId id="258" r:id="rId9"/>
   </p:sldIdLst>
-  <p:sldSz cx="12191695" cy="6858000" type="screen4x3"/>
+  <p:sldSz cx="12191695" cy="7772400" type="screen4x3"/>
   <p:notesSz cx="6858000" cy="9144000"/>
   <p:defaultTextStyle>
     <a:defPPr>
@@ -3099,7 +3099,533 @@
         <p:spPr>
           <a:xfrm>
             <a:off x="457200" y="685800"/>
-            <a:ext cx="5486400" cy="5715000"/>
+            <a:ext cx="6583680" cy="6629400"/>
+          </a:xfrm>
+          <a:prstGeom prst="roundRect">
+            <a:avLst>
+              <a:gd name="adj" fmla="val 5000"/>
+            </a:avLst>
+          </a:prstGeom>
+          <a:solidFill>
+            <a:srgbClr val="EEF3F9"/>
+          </a:solidFill>
+          <a:ln w="20320">
+            <a:solidFill>
+              <a:srgbClr val="2E5E8E"/>
+            </a:solidFill>
+          </a:ln>
+          <a:effectLst/>
+        </p:spPr>
+        <p:style>
+          <a:lnRef idx="1">
+            <a:schemeClr val="accent1"/>
+          </a:lnRef>
+          <a:fillRef idx="3">
+            <a:schemeClr val="accent1"/>
+          </a:fillRef>
+          <a:effectRef idx="2">
+            <a:schemeClr val="accent1"/>
+          </a:effectRef>
+          <a:fontRef idx="minor">
+            <a:schemeClr val="lt1"/>
+          </a:fontRef>
+        </p:style>
+        <p:txBody>
+          <a:bodyPr rtlCol="0" anchor="ctr"/>
+          <a:lstStyle/>
+          <a:p>
+            <a:pPr algn="ctr"/>
+          </a:p>
+        </p:txBody>
+      </p:sp>
+      <p:sp>
+        <p:nvSpPr>
+          <p:cNvPr id="3" name="Rounded Rectangle 2"/>
+          <p:cNvSpPr/>
+          <p:nvPr/>
+        </p:nvSpPr>
+        <p:spPr>
+          <a:xfrm>
+            <a:off x="731520" y="448056"/>
+            <a:ext cx="4937760" cy="475488"/>
+          </a:xfrm>
+          <a:prstGeom prst="roundRect">
+            <a:avLst>
+              <a:gd name="adj" fmla="val 50000"/>
+            </a:avLst>
+          </a:prstGeom>
+          <a:solidFill>
+            <a:srgbClr val="2E5E8E"/>
+          </a:solidFill>
+          <a:ln>
+            <a:noFill/>
+          </a:ln>
+          <a:effectLst/>
+        </p:spPr>
+        <p:style>
+          <a:lnRef idx="1">
+            <a:schemeClr val="accent1"/>
+          </a:lnRef>
+          <a:fillRef idx="3">
+            <a:schemeClr val="accent1"/>
+          </a:fillRef>
+          <a:effectRef idx="2">
+            <a:schemeClr val="accent1"/>
+          </a:effectRef>
+          <a:fontRef idx="minor">
+            <a:schemeClr val="lt1"/>
+          </a:fontRef>
+        </p:style>
+        <p:txBody>
+          <a:bodyPr rtlCol="0" anchor="ctr" wrap="square" lIns="73152" rIns="73152" tIns="27432" bIns="27432"/>
+          <a:lstStyle/>
+          <a:p>
+            <a:pPr algn="ctr"/>
+            <a:r>
+              <a:rPr sz="1800" b="1">
+                <a:solidFill>
+                  <a:srgbClr val="FFFFFF"/>
+                </a:solidFill>
+                <a:latin typeface="Noto Sans CJK JP"/>
+                <a:ea typeface="Noto Sans CJK JP"/>
+              </a:rPr>
+              <a:t>HTTPリクエスト数（1秒あたり）</a:t>
+            </a:r>
+          </a:p>
+        </p:txBody>
+      </p:sp>
+      <p:sp>
+        <p:nvSpPr>
+          <p:cNvPr id="4" name="Rectangle 3"/>
+          <p:cNvSpPr/>
+          <p:nvPr/>
+        </p:nvSpPr>
+        <p:spPr>
+          <a:xfrm>
+            <a:off x="1371600" y="4586630"/>
+            <a:ext cx="1828800" cy="1997049"/>
+          </a:xfrm>
+          <a:prstGeom prst="rect">
+            <a:avLst/>
+          </a:prstGeom>
+          <a:solidFill>
+            <a:srgbClr val="2E5E8E"/>
+          </a:solidFill>
+          <a:ln>
+            <a:noFill/>
+          </a:ln>
+          <a:effectLst/>
+        </p:spPr>
+        <p:style>
+          <a:lnRef idx="1">
+            <a:schemeClr val="accent1"/>
+          </a:lnRef>
+          <a:fillRef idx="3">
+            <a:schemeClr val="accent1"/>
+          </a:fillRef>
+          <a:effectRef idx="2">
+            <a:schemeClr val="accent1"/>
+          </a:effectRef>
+          <a:fontRef idx="minor">
+            <a:schemeClr val="lt1"/>
+          </a:fontRef>
+        </p:style>
+        <p:txBody>
+          <a:bodyPr rtlCol="0" anchor="ctr"/>
+          <a:lstStyle/>
+          <a:p>
+            <a:pPr algn="ctr"/>
+          </a:p>
+        </p:txBody>
+      </p:sp>
+      <p:sp>
+        <p:nvSpPr>
+          <p:cNvPr id="5" name="Rectangle 4"/>
+          <p:cNvSpPr/>
+          <p:nvPr/>
+        </p:nvSpPr>
+        <p:spPr>
+          <a:xfrm>
+            <a:off x="4206240" y="2938272"/>
+            <a:ext cx="1828800" cy="3645407"/>
+          </a:xfrm>
+          <a:prstGeom prst="rect">
+            <a:avLst/>
+          </a:prstGeom>
+          <a:solidFill>
+            <a:srgbClr val="2E5E8E"/>
+          </a:solidFill>
+          <a:ln>
+            <a:noFill/>
+          </a:ln>
+          <a:effectLst/>
+        </p:spPr>
+        <p:style>
+          <a:lnRef idx="1">
+            <a:schemeClr val="accent1"/>
+          </a:lnRef>
+          <a:fillRef idx="3">
+            <a:schemeClr val="accent1"/>
+          </a:fillRef>
+          <a:effectRef idx="2">
+            <a:schemeClr val="accent1"/>
+          </a:effectRef>
+          <a:fontRef idx="minor">
+            <a:schemeClr val="lt1"/>
+          </a:fontRef>
+        </p:style>
+        <p:txBody>
+          <a:bodyPr rtlCol="0" anchor="ctr"/>
+          <a:lstStyle/>
+          <a:p>
+            <a:pPr algn="ctr"/>
+          </a:p>
+        </p:txBody>
+      </p:sp>
+      <p:sp>
+        <p:nvSpPr>
+          <p:cNvPr id="6" name="Rounded Rectangle 5"/>
+          <p:cNvSpPr/>
+          <p:nvPr/>
+        </p:nvSpPr>
+        <p:spPr>
+          <a:xfrm>
+            <a:off x="4206240" y="1828800"/>
+            <a:ext cx="1828800" cy="1109472"/>
+          </a:xfrm>
+          <a:prstGeom prst="roundRect">
+            <a:avLst>
+              <a:gd name="adj" fmla="val 0"/>
+            </a:avLst>
+          </a:prstGeom>
+          <a:noFill/>
+          <a:ln w="17780">
+            <a:solidFill>
+              <a:srgbClr val="2E5E8E"/>
+            </a:solidFill>
+            <a:prstDash val="dash"/>
+          </a:ln>
+          <a:effectLst/>
+        </p:spPr>
+        <p:style>
+          <a:lnRef idx="1">
+            <a:schemeClr val="accent1"/>
+          </a:lnRef>
+          <a:fillRef idx="3">
+            <a:schemeClr val="accent1"/>
+          </a:fillRef>
+          <a:effectRef idx="2">
+            <a:schemeClr val="accent1"/>
+          </a:effectRef>
+          <a:fontRef idx="minor">
+            <a:schemeClr val="lt1"/>
+          </a:fontRef>
+        </p:style>
+        <p:txBody>
+          <a:bodyPr rtlCol="0" anchor="ctr"/>
+          <a:lstStyle/>
+          <a:p>
+            <a:pPr algn="ctr"/>
+          </a:p>
+        </p:txBody>
+      </p:sp>
+      <p:sp>
+        <p:nvSpPr>
+          <p:cNvPr id="7" name="TextBox 6"/>
+          <p:cNvSpPr txBox="1"/>
+          <p:nvPr/>
+        </p:nvSpPr>
+        <p:spPr>
+          <a:xfrm>
+            <a:off x="1097280" y="4037990"/>
+            <a:ext cx="2377440" cy="457200"/>
+          </a:xfrm>
+          <a:prstGeom prst="rect">
+            <a:avLst/>
+          </a:prstGeom>
+          <a:noFill/>
+        </p:spPr>
+        <p:txBody>
+          <a:bodyPr wrap="square" anchor="ctr" lIns="73152" rIns="73152" tIns="27432" bIns="27432">
+            <a:spAutoFit/>
+          </a:bodyPr>
+          <a:lstStyle/>
+          <a:p>
+            <a:pPr algn="ctr"/>
+            <a:r>
+              <a:rPr sz="2000" b="1">
+                <a:solidFill>
+                  <a:srgbClr val="1F3A5C"/>
+                </a:solidFill>
+                <a:latin typeface="Noto Sans CJK JP"/>
+                <a:ea typeface="Noto Sans CJK JP"/>
+              </a:rPr>
+              <a:t>6,300万</a:t>
+            </a:r>
+          </a:p>
+        </p:txBody>
+      </p:sp>
+      <p:sp>
+        <p:nvSpPr>
+          <p:cNvPr id="8" name="TextBox 7"/>
+          <p:cNvSpPr txBox="1"/>
+          <p:nvPr/>
+        </p:nvSpPr>
+        <p:spPr>
+          <a:xfrm>
+            <a:off x="4023360" y="3029712"/>
+            <a:ext cx="2194560" cy="457200"/>
+          </a:xfrm>
+          <a:prstGeom prst="rect">
+            <a:avLst/>
+          </a:prstGeom>
+          <a:noFill/>
+        </p:spPr>
+        <p:txBody>
+          <a:bodyPr wrap="square" anchor="ctr" lIns="73152" rIns="73152" tIns="27432" bIns="27432">
+            <a:spAutoFit/>
+          </a:bodyPr>
+          <a:lstStyle/>
+          <a:p>
+            <a:pPr algn="ctr"/>
+            <a:r>
+              <a:rPr sz="2000" b="1">
+                <a:solidFill>
+                  <a:srgbClr val="FFFFFF"/>
+                </a:solidFill>
+                <a:latin typeface="Noto Sans CJK JP"/>
+                <a:ea typeface="Noto Sans CJK JP"/>
+              </a:rPr>
+              <a:t>1億1,500万</a:t>
+            </a:r>
+          </a:p>
+        </p:txBody>
+      </p:sp>
+      <p:sp>
+        <p:nvSpPr>
+          <p:cNvPr id="9" name="TextBox 8"/>
+          <p:cNvSpPr txBox="1"/>
+          <p:nvPr/>
+        </p:nvSpPr>
+        <p:spPr>
+          <a:xfrm>
+            <a:off x="3566160" y="1280160"/>
+            <a:ext cx="3108960" cy="457200"/>
+          </a:xfrm>
+          <a:prstGeom prst="rect">
+            <a:avLst/>
+          </a:prstGeom>
+          <a:noFill/>
+        </p:spPr>
+        <p:txBody>
+          <a:bodyPr wrap="square" anchor="ctr" lIns="73152" rIns="73152" tIns="27432" bIns="27432">
+            <a:spAutoFit/>
+          </a:bodyPr>
+          <a:lstStyle/>
+          <a:p>
+            <a:pPr algn="ctr"/>
+            <a:r>
+              <a:rPr sz="1600" b="1">
+                <a:solidFill>
+                  <a:srgbClr val="2E5E8E"/>
+                </a:solidFill>
+                <a:latin typeface="Noto Sans CJK JP"/>
+                <a:ea typeface="Noto Sans CJK JP"/>
+              </a:rPr>
+              <a:t>ピーク時 1億5,000万超</a:t>
+            </a:r>
+          </a:p>
+        </p:txBody>
+      </p:sp>
+      <p:cxnSp>
+        <p:nvCxnSpPr>
+          <p:cNvPr id="10" name="Connector 9"/>
+          <p:cNvCxnSpPr/>
+          <p:nvPr/>
+        </p:nvCxnSpPr>
+        <p:spPr>
+          <a:xfrm flipV="1">
+            <a:off x="3291840" y="3395472"/>
+            <a:ext cx="822960" cy="1282598"/>
+          </a:xfrm>
+          <a:prstGeom prst="line">
+            <a:avLst/>
+          </a:prstGeom>
+          <a:ln w="19050">
+            <a:solidFill>
+              <a:srgbClr val="2E5E8E"/>
+            </a:solidFill>
+            <a:tailEnd type="triangle" w="med" len="med"/>
+          </a:ln>
+        </p:spPr>
+        <p:style>
+          <a:lnRef idx="2">
+            <a:schemeClr val="accent1"/>
+          </a:lnRef>
+          <a:fillRef idx="0">
+            <a:schemeClr val="accent1"/>
+          </a:fillRef>
+          <a:effectRef idx="1">
+            <a:schemeClr val="accent1"/>
+          </a:effectRef>
+          <a:fontRef idx="minor">
+            <a:schemeClr val="tx1"/>
+          </a:fontRef>
+        </p:style>
+      </p:cxnSp>
+      <p:sp>
+        <p:nvSpPr>
+          <p:cNvPr id="11" name="TextBox 10"/>
+          <p:cNvSpPr txBox="1"/>
+          <p:nvPr/>
+        </p:nvSpPr>
+        <p:spPr>
+          <a:xfrm>
+            <a:off x="2377440" y="2801112"/>
+            <a:ext cx="1737360" cy="457200"/>
+          </a:xfrm>
+          <a:prstGeom prst="rect">
+            <a:avLst/>
+          </a:prstGeom>
+          <a:noFill/>
+        </p:spPr>
+        <p:txBody>
+          <a:bodyPr wrap="square" anchor="ctr" lIns="73152" rIns="73152" tIns="27432" bIns="27432">
+            <a:spAutoFit/>
+          </a:bodyPr>
+          <a:lstStyle/>
+          <a:p>
+            <a:pPr algn="ctr"/>
+            <a:r>
+              <a:rPr sz="2000" b="1">
+                <a:solidFill>
+                  <a:srgbClr val="2E5E8E"/>
+                </a:solidFill>
+                <a:latin typeface="Noto Sans CJK JP"/>
+                <a:ea typeface="Noto Sans CJK JP"/>
+              </a:rPr>
+              <a:t>約1.8倍</a:t>
+            </a:r>
+          </a:p>
+        </p:txBody>
+      </p:sp>
+      <p:cxnSp>
+        <p:nvCxnSpPr>
+          <p:cNvPr id="12" name="Connector 11"/>
+          <p:cNvCxnSpPr/>
+          <p:nvPr/>
+        </p:nvCxnSpPr>
+        <p:spPr>
+          <a:xfrm>
+            <a:off x="822960" y="6583680"/>
+            <a:ext cx="5852160" cy="0"/>
+          </a:xfrm>
+          <a:prstGeom prst="line">
+            <a:avLst/>
+          </a:prstGeom>
+          <a:ln w="19050">
+            <a:solidFill>
+              <a:srgbClr val="6B7280"/>
+            </a:solidFill>
+          </a:ln>
+        </p:spPr>
+        <p:style>
+          <a:lnRef idx="2">
+            <a:schemeClr val="accent1"/>
+          </a:lnRef>
+          <a:fillRef idx="0">
+            <a:schemeClr val="accent1"/>
+          </a:fillRef>
+          <a:effectRef idx="1">
+            <a:schemeClr val="accent1"/>
+          </a:effectRef>
+          <a:fontRef idx="minor">
+            <a:schemeClr val="tx1"/>
+          </a:fontRef>
+        </p:style>
+      </p:cxnSp>
+      <p:sp>
+        <p:nvSpPr>
+          <p:cNvPr id="13" name="TextBox 12"/>
+          <p:cNvSpPr txBox="1"/>
+          <p:nvPr/>
+        </p:nvSpPr>
+        <p:spPr>
+          <a:xfrm>
+            <a:off x="1188720" y="6656832"/>
+            <a:ext cx="2194560" cy="411480"/>
+          </a:xfrm>
+          <a:prstGeom prst="rect">
+            <a:avLst/>
+          </a:prstGeom>
+          <a:noFill/>
+        </p:spPr>
+        <p:txBody>
+          <a:bodyPr wrap="square" anchor="ctr" lIns="73152" rIns="73152" tIns="27432" bIns="27432">
+            <a:spAutoFit/>
+          </a:bodyPr>
+          <a:lstStyle/>
+          <a:p>
+            <a:pPr algn="ctr"/>
+            <a:r>
+              <a:rPr sz="1600" b="0">
+                <a:solidFill>
+                  <a:srgbClr val="1F3A5C"/>
+                </a:solidFill>
+                <a:latin typeface="Noto Sans CJK JP"/>
+                <a:ea typeface="Noto Sans CJK JP"/>
+              </a:rPr>
+              <a:t>2024年末</a:t>
+            </a:r>
+          </a:p>
+        </p:txBody>
+      </p:sp>
+      <p:sp>
+        <p:nvSpPr>
+          <p:cNvPr id="14" name="TextBox 13"/>
+          <p:cNvSpPr txBox="1"/>
+          <p:nvPr/>
+        </p:nvSpPr>
+        <p:spPr>
+          <a:xfrm>
+            <a:off x="4023360" y="6656832"/>
+            <a:ext cx="2194560" cy="411480"/>
+          </a:xfrm>
+          <a:prstGeom prst="rect">
+            <a:avLst/>
+          </a:prstGeom>
+          <a:noFill/>
+        </p:spPr>
+        <p:txBody>
+          <a:bodyPr wrap="square" anchor="ctr" lIns="73152" rIns="73152" tIns="27432" bIns="27432">
+            <a:spAutoFit/>
+          </a:bodyPr>
+          <a:lstStyle/>
+          <a:p>
+            <a:pPr algn="ctr"/>
+            <a:r>
+              <a:rPr sz="1600" b="0">
+                <a:solidFill>
+                  <a:srgbClr val="1F3A5C"/>
+                </a:solidFill>
+                <a:latin typeface="Noto Sans CJK JP"/>
+                <a:ea typeface="Noto Sans CJK JP"/>
+              </a:rPr>
+              <a:t>2026年9月</a:t>
+            </a:r>
+          </a:p>
+        </p:txBody>
+      </p:sp>
+      <p:sp>
+        <p:nvSpPr>
+          <p:cNvPr id="15" name="Rounded Rectangle 14"/>
+          <p:cNvSpPr/>
+          <p:nvPr/>
+        </p:nvSpPr>
+        <p:spPr>
+          <a:xfrm>
+            <a:off x="7360920" y="685800"/>
+            <a:ext cx="4389120" cy="6629400"/>
           </a:xfrm>
           <a:prstGeom prst="roundRect">
             <a:avLst>
@@ -3140,14 +3666,14 @@
       </p:sp>
       <p:sp>
         <p:nvSpPr>
-          <p:cNvPr id="3" name="Rounded Rectangle 2"/>
+          <p:cNvPr id="16" name="Rounded Rectangle 15"/>
           <p:cNvSpPr/>
           <p:nvPr/>
         </p:nvSpPr>
         <p:spPr>
           <a:xfrm>
-            <a:off x="731520" y="448056"/>
-            <a:ext cx="3566160" cy="475488"/>
+            <a:off x="7635240" y="448056"/>
+            <a:ext cx="1920240" cy="475488"/>
           </a:xfrm>
           <a:prstGeom prst="roundRect">
             <a:avLst>
@@ -3189,27 +3715,29 @@
                 <a:latin typeface="Noto Sans CJK JP"/>
                 <a:ea typeface="Noto Sans CJK JP"/>
               </a:rPr>
-              <a:t>AIエージェントの通信</a:t>
-            </a:r>
-          </a:p>
-        </p:txBody>
-      </p:sp>
-      <p:sp>
-        <p:nvSpPr>
-          <p:cNvPr id="4" name="Rectangle 3"/>
+              <a:t>中身の変化</a:t>
+            </a:r>
+          </a:p>
+        </p:txBody>
+      </p:sp>
+      <p:sp>
+        <p:nvSpPr>
+          <p:cNvPr id="17" name="Rounded Rectangle 16"/>
           <p:cNvSpPr/>
           <p:nvPr/>
         </p:nvSpPr>
         <p:spPr>
           <a:xfrm>
-            <a:off x="1280160" y="5273040"/>
-            <a:ext cx="1463040" cy="213360"/>
-          </a:xfrm>
-          <a:prstGeom prst="rect">
-            <a:avLst/>
+            <a:off x="7589520" y="1280160"/>
+            <a:ext cx="3931920" cy="2011680"/>
+          </a:xfrm>
+          <a:prstGeom prst="roundRect">
+            <a:avLst>
+              <a:gd name="adj" fmla="val 16000"/>
+            </a:avLst>
           </a:prstGeom>
           <a:solidFill>
-            <a:srgbClr val="C9E8E4"/>
+            <a:srgbClr val="FFFFFF"/>
           </a:solidFill>
           <a:ln w="17780">
             <a:solidFill>
@@ -3233,32 +3761,72 @@
           </a:fontRef>
         </p:style>
         <p:txBody>
-          <a:bodyPr rtlCol="0" anchor="ctr"/>
-          <a:lstStyle/>
-          <a:p>
-            <a:pPr algn="ctr"/>
-          </a:p>
-        </p:txBody>
-      </p:sp>
-      <p:sp>
-        <p:nvSpPr>
-          <p:cNvPr id="5" name="Rectangle 4"/>
+          <a:bodyPr rtlCol="0" anchor="ctr" wrap="square" lIns="73152" rIns="73152" tIns="27432" bIns="27432"/>
+          <a:lstStyle/>
+          <a:p>
+            <a:pPr algn="ctr"/>
+            <a:r>
+              <a:rPr sz="3000" b="1">
+                <a:solidFill>
+                  <a:srgbClr val="1E8A82"/>
+                </a:solidFill>
+                <a:latin typeface="Noto Sans CJK JP"/>
+                <a:ea typeface="Noto Sans CJK JP"/>
+              </a:rPr>
+              <a:t>18倍以上</a:t>
+            </a:r>
+          </a:p>
+          <a:p>
+            <a:pPr algn="ctr"/>
+            <a:r>
+              <a:rPr sz="1600" b="0">
+                <a:solidFill>
+                  <a:srgbClr val="1F3A5C"/>
+                </a:solidFill>
+                <a:latin typeface="Noto Sans CJK JP"/>
+                <a:ea typeface="Noto Sans CJK JP"/>
+              </a:rPr>
+              <a:t>AIエージェントの</a:t>
+            </a:r>
+          </a:p>
+          <a:p>
+            <a:pPr algn="ctr"/>
+            <a:r>
+              <a:rPr sz="1600" b="0">
+                <a:solidFill>
+                  <a:srgbClr val="1F3A5C"/>
+                </a:solidFill>
+                <a:latin typeface="Noto Sans CJK JP"/>
+                <a:ea typeface="Noto Sans CJK JP"/>
+              </a:rPr>
+              <a:t>1日あたりリクエスト（1年間）</a:t>
+            </a:r>
+          </a:p>
+        </p:txBody>
+      </p:sp>
+      <p:sp>
+        <p:nvSpPr>
+          <p:cNvPr id="18" name="Rounded Rectangle 17"/>
           <p:cNvSpPr/>
           <p:nvPr/>
         </p:nvSpPr>
         <p:spPr>
           <a:xfrm>
-            <a:off x="3657600" y="1645919"/>
-            <a:ext cx="1463040" cy="3840480"/>
-          </a:xfrm>
-          <a:prstGeom prst="rect">
-            <a:avLst/>
+            <a:off x="7589520" y="3520440"/>
+            <a:ext cx="3931920" cy="1783080"/>
+          </a:xfrm>
+          <a:prstGeom prst="roundRect">
+            <a:avLst>
+              <a:gd name="adj" fmla="val 16000"/>
+            </a:avLst>
           </a:prstGeom>
           <a:solidFill>
-            <a:srgbClr val="1E8A82"/>
+            <a:srgbClr val="FFFFFF"/>
           </a:solidFill>
-          <a:ln>
-            <a:noFill/>
+          <a:ln w="17780">
+            <a:solidFill>
+              <a:srgbClr val="C0392B"/>
+            </a:solidFill>
           </a:ln>
           <a:effectLst/>
         </p:spPr>
@@ -3277,284 +3845,69 @@
           </a:fontRef>
         </p:style>
         <p:txBody>
-          <a:bodyPr rtlCol="0" anchor="ctr"/>
-          <a:lstStyle/>
-          <a:p>
-            <a:pPr algn="ctr"/>
-          </a:p>
-        </p:txBody>
-      </p:sp>
-      <p:sp>
-        <p:nvSpPr>
-          <p:cNvPr id="6" name="TextBox 5"/>
-          <p:cNvSpPr txBox="1"/>
-          <p:nvPr/>
-        </p:nvSpPr>
-        <p:spPr>
-          <a:xfrm>
-            <a:off x="1097280" y="4770120"/>
-            <a:ext cx="1828800" cy="457200"/>
-          </a:xfrm>
-          <a:prstGeom prst="rect">
-            <a:avLst/>
-          </a:prstGeom>
-          <a:noFill/>
-        </p:spPr>
-        <p:txBody>
-          <a:bodyPr wrap="square" anchor="ctr" lIns="73152" rIns="73152" tIns="27432" bIns="27432">
-            <a:spAutoFit/>
-          </a:bodyPr>
-          <a:lstStyle/>
-          <a:p>
-            <a:pPr algn="ctr"/>
-            <a:r>
-              <a:rPr sz="1800" b="1">
-                <a:solidFill>
-                  <a:srgbClr val="1F3A5C"/>
+          <a:bodyPr rtlCol="0" anchor="ctr" wrap="square" lIns="73152" rIns="73152" tIns="27432" bIns="27432"/>
+          <a:lstStyle/>
+          <a:p>
+            <a:pPr algn="ctr"/>
+            <a:r>
+              <a:rPr sz="3000" b="1">
+                <a:solidFill>
+                  <a:srgbClr val="C0392B"/>
                 </a:solidFill>
                 <a:latin typeface="Noto Sans CJK JP"/>
                 <a:ea typeface="Noto Sans CJK JP"/>
               </a:rPr>
-              <a:t>1</a:t>
-            </a:r>
-          </a:p>
-        </p:txBody>
-      </p:sp>
-      <p:sp>
-        <p:nvSpPr>
-          <p:cNvPr id="7" name="TextBox 6"/>
-          <p:cNvSpPr txBox="1"/>
-          <p:nvPr/>
-        </p:nvSpPr>
-        <p:spPr>
-          <a:xfrm>
-            <a:off x="3291840" y="1097279"/>
-            <a:ext cx="2194560" cy="502920"/>
-          </a:xfrm>
-          <a:prstGeom prst="rect">
-            <a:avLst/>
-          </a:prstGeom>
-          <a:noFill/>
-        </p:spPr>
-        <p:txBody>
-          <a:bodyPr wrap="square" anchor="ctr" lIns="73152" rIns="73152" tIns="27432" bIns="27432">
-            <a:spAutoFit/>
-          </a:bodyPr>
-          <a:lstStyle/>
-          <a:p>
-            <a:pPr algn="ctr"/>
-            <a:r>
-              <a:rPr sz="2000" b="1">
-                <a:solidFill>
-                  <a:srgbClr val="1E8A82"/>
+              <a:t>最大4割減</a:t>
+            </a:r>
+          </a:p>
+          <a:p>
+            <a:pPr algn="ctr"/>
+            <a:r>
+              <a:rPr sz="1600" b="0">
+                <a:solidFill>
+                  <a:srgbClr val="1F3A5C"/>
                 </a:solidFill>
                 <a:latin typeface="Noto Sans CJK JP"/>
                 <a:ea typeface="Noto Sans CJK JP"/>
               </a:rPr>
-              <a:t>18倍以上</a:t>
-            </a:r>
-          </a:p>
-        </p:txBody>
-      </p:sp>
-      <p:cxnSp>
-        <p:nvCxnSpPr>
-          <p:cNvPr id="8" name="Connector 7"/>
-          <p:cNvCxnSpPr/>
-          <p:nvPr/>
-        </p:nvCxnSpPr>
-        <p:spPr>
-          <a:xfrm flipV="1">
-            <a:off x="2103120" y="2377440"/>
-            <a:ext cx="1417320" cy="2194560"/>
-          </a:xfrm>
-          <a:prstGeom prst="line">
-            <a:avLst/>
-          </a:prstGeom>
-          <a:ln w="19050">
-            <a:solidFill>
-              <a:srgbClr val="1E8A82"/>
-            </a:solidFill>
-            <a:tailEnd type="triangle" w="med" len="med"/>
-          </a:ln>
-        </p:spPr>
-        <p:style>
-          <a:lnRef idx="2">
-            <a:schemeClr val="accent1"/>
-          </a:lnRef>
-          <a:fillRef idx="0">
-            <a:schemeClr val="accent1"/>
-          </a:fillRef>
-          <a:effectRef idx="1">
-            <a:schemeClr val="accent1"/>
-          </a:effectRef>
-          <a:fontRef idx="minor">
-            <a:schemeClr val="tx1"/>
-          </a:fontRef>
-        </p:style>
-      </p:cxnSp>
-      <p:sp>
-        <p:nvSpPr>
-          <p:cNvPr id="9" name="TextBox 8"/>
-          <p:cNvSpPr txBox="1"/>
-          <p:nvPr/>
-        </p:nvSpPr>
-        <p:spPr>
-          <a:xfrm>
-            <a:off x="640080" y="2560320"/>
-            <a:ext cx="2651760" cy="457200"/>
-          </a:xfrm>
-          <a:prstGeom prst="rect">
-            <a:avLst/>
-          </a:prstGeom>
-          <a:noFill/>
-        </p:spPr>
-        <p:txBody>
-          <a:bodyPr wrap="square" anchor="ctr" lIns="73152" rIns="73152" tIns="27432" bIns="27432">
-            <a:spAutoFit/>
-          </a:bodyPr>
-          <a:lstStyle/>
-          <a:p>
-            <a:pPr algn="ctr"/>
-            <a:r>
-              <a:rPr sz="1600" b="1">
-                <a:solidFill>
-                  <a:srgbClr val="1E8A82"/>
+              <a:t>人からのトラフィック</a:t>
+            </a:r>
+          </a:p>
+          <a:p>
+            <a:pPr algn="ctr"/>
+            <a:r>
+              <a:rPr sz="1600" b="0">
+                <a:solidFill>
+                  <a:srgbClr val="6B7280"/>
                 </a:solidFill>
                 <a:latin typeface="Noto Sans CJK JP"/>
                 <a:ea typeface="Noto Sans CJK JP"/>
               </a:rPr>
-              <a:t>1年で1,700%以上増</a:t>
-            </a:r>
-          </a:p>
-        </p:txBody>
-      </p:sp>
-      <p:cxnSp>
-        <p:nvCxnSpPr>
-          <p:cNvPr id="10" name="Connector 9"/>
-          <p:cNvCxnSpPr/>
-          <p:nvPr/>
-        </p:nvCxnSpPr>
-        <p:spPr>
-          <a:xfrm>
-            <a:off x="822960" y="5486400"/>
-            <a:ext cx="4754880" cy="0"/>
-          </a:xfrm>
-          <a:prstGeom prst="line">
-            <a:avLst/>
-          </a:prstGeom>
-          <a:ln>
-            <a:solidFill>
-              <a:srgbClr val="6B7280"/>
-            </a:solidFill>
-          </a:ln>
-        </p:spPr>
-        <p:style>
-          <a:lnRef idx="2">
-            <a:schemeClr val="accent1"/>
-          </a:lnRef>
-          <a:fillRef idx="0">
-            <a:schemeClr val="accent1"/>
-          </a:fillRef>
-          <a:effectRef idx="1">
-            <a:schemeClr val="accent1"/>
-          </a:effectRef>
-          <a:fontRef idx="minor">
-            <a:schemeClr val="tx1"/>
-          </a:fontRef>
-        </p:style>
-      </p:cxnSp>
-      <p:sp>
-        <p:nvSpPr>
-          <p:cNvPr id="11" name="TextBox 10"/>
-          <p:cNvSpPr txBox="1"/>
-          <p:nvPr/>
-        </p:nvSpPr>
-        <p:spPr>
-          <a:xfrm>
-            <a:off x="1097280" y="5577840"/>
-            <a:ext cx="1828800" cy="411480"/>
-          </a:xfrm>
-          <a:prstGeom prst="rect">
-            <a:avLst/>
-          </a:prstGeom>
-          <a:noFill/>
-        </p:spPr>
-        <p:txBody>
-          <a:bodyPr wrap="square" anchor="ctr" lIns="73152" rIns="73152" tIns="27432" bIns="27432">
-            <a:spAutoFit/>
-          </a:bodyPr>
-          <a:lstStyle/>
-          <a:p>
-            <a:pPr algn="ctr"/>
-            <a:r>
-              <a:rPr sz="1600" b="0">
-                <a:solidFill>
-                  <a:srgbClr val="1F3A5C"/>
-                </a:solidFill>
-                <a:latin typeface="Noto Sans CJK JP"/>
-                <a:ea typeface="Noto Sans CJK JP"/>
-              </a:rPr>
-              <a:t>1年前</a:t>
-            </a:r>
-          </a:p>
-        </p:txBody>
-      </p:sp>
-      <p:sp>
-        <p:nvSpPr>
-          <p:cNvPr id="12" name="TextBox 11"/>
-          <p:cNvSpPr txBox="1"/>
-          <p:nvPr/>
-        </p:nvSpPr>
-        <p:spPr>
-          <a:xfrm>
-            <a:off x="3474720" y="5577840"/>
-            <a:ext cx="1828800" cy="411480"/>
-          </a:xfrm>
-          <a:prstGeom prst="rect">
-            <a:avLst/>
-          </a:prstGeom>
-          <a:noFill/>
-        </p:spPr>
-        <p:txBody>
-          <a:bodyPr wrap="square" anchor="ctr" lIns="73152" rIns="73152" tIns="27432" bIns="27432">
-            <a:spAutoFit/>
-          </a:bodyPr>
-          <a:lstStyle/>
-          <a:p>
-            <a:pPr algn="ctr"/>
-            <a:r>
-              <a:rPr sz="1600" b="0">
-                <a:solidFill>
-                  <a:srgbClr val="1F3A5C"/>
-                </a:solidFill>
-                <a:latin typeface="Noto Sans CJK JP"/>
-                <a:ea typeface="Noto Sans CJK JP"/>
-              </a:rPr>
-              <a:t>現在</a:t>
-            </a:r>
-          </a:p>
-        </p:txBody>
-      </p:sp>
-      <p:sp>
-        <p:nvSpPr>
-          <p:cNvPr id="13" name="Rounded Rectangle 12"/>
+              <a:t>（業界によっては1年未満で）</a:t>
+            </a:r>
+          </a:p>
+        </p:txBody>
+      </p:sp>
+      <p:sp>
+        <p:nvSpPr>
+          <p:cNvPr id="19" name="Rounded Rectangle 18"/>
           <p:cNvSpPr/>
           <p:nvPr/>
         </p:nvSpPr>
         <p:spPr>
           <a:xfrm>
-            <a:off x="6263640" y="685800"/>
-            <a:ext cx="5486400" cy="5715000"/>
+            <a:off x="7589520" y="5532120"/>
+            <a:ext cx="3931920" cy="1554480"/>
           </a:xfrm>
           <a:prstGeom prst="roundRect">
             <a:avLst>
-              <a:gd name="adj" fmla="val 5000"/>
+              <a:gd name="adj" fmla="val 16000"/>
             </a:avLst>
           </a:prstGeom>
           <a:solidFill>
-            <a:srgbClr val="EEF3F9"/>
+            <a:srgbClr val="FFFFFF"/>
           </a:solidFill>
-          <a:ln w="20320">
+          <a:ln w="17780">
             <a:solidFill>
               <a:srgbClr val="2E5E8E"/>
             </a:solidFill>
@@ -3576,379 +3929,45 @@
           </a:fontRef>
         </p:style>
         <p:txBody>
-          <a:bodyPr rtlCol="0" anchor="ctr"/>
-          <a:lstStyle/>
-          <a:p>
-            <a:pPr algn="ctr"/>
-          </a:p>
-        </p:txBody>
-      </p:sp>
-      <p:sp>
-        <p:nvSpPr>
-          <p:cNvPr id="14" name="Rounded Rectangle 13"/>
-          <p:cNvSpPr/>
-          <p:nvPr/>
-        </p:nvSpPr>
-        <p:spPr>
-          <a:xfrm>
-            <a:off x="6537959" y="448056"/>
-            <a:ext cx="2743200" cy="475488"/>
-          </a:xfrm>
-          <a:prstGeom prst="roundRect">
-            <a:avLst>
-              <a:gd name="adj" fmla="val 50000"/>
-            </a:avLst>
-          </a:prstGeom>
-          <a:solidFill>
-            <a:srgbClr val="2E5E8E"/>
-          </a:solidFill>
-          <a:ln>
-            <a:noFill/>
-          </a:ln>
-          <a:effectLst/>
-        </p:spPr>
-        <p:style>
-          <a:lnRef idx="1">
-            <a:schemeClr val="accent1"/>
-          </a:lnRef>
-          <a:fillRef idx="3">
-            <a:schemeClr val="accent1"/>
-          </a:fillRef>
-          <a:effectRef idx="2">
-            <a:schemeClr val="accent1"/>
-          </a:effectRef>
-          <a:fontRef idx="minor">
-            <a:schemeClr val="lt1"/>
-          </a:fontRef>
-        </p:style>
-        <p:txBody>
           <a:bodyPr rtlCol="0" anchor="ctr" wrap="square" lIns="73152" rIns="73152" tIns="27432" bIns="27432"/>
           <a:lstStyle/>
           <a:p>
             <a:pPr algn="ctr"/>
             <a:r>
-              <a:rPr sz="1800" b="1">
-                <a:solidFill>
-                  <a:srgbClr val="FFFFFF"/>
+              <a:rPr sz="2800" b="1">
+                <a:solidFill>
+                  <a:srgbClr val="2E5E8E"/>
                 </a:solidFill>
                 <a:latin typeface="Noto Sans CJK JP"/>
                 <a:ea typeface="Noto Sans CJK JP"/>
               </a:rPr>
-              <a:t>人からのアクセス</a:t>
-            </a:r>
-          </a:p>
-        </p:txBody>
-      </p:sp>
-      <p:sp>
-        <p:nvSpPr>
-          <p:cNvPr id="15" name="Rectangle 14"/>
-          <p:cNvSpPr/>
-          <p:nvPr/>
-        </p:nvSpPr>
-        <p:spPr>
-          <a:xfrm>
-            <a:off x="7086600" y="1645919"/>
-            <a:ext cx="1463040" cy="3840480"/>
-          </a:xfrm>
-          <a:prstGeom prst="rect">
-            <a:avLst/>
-          </a:prstGeom>
-          <a:solidFill>
-            <a:srgbClr val="2E5E8E"/>
-          </a:solidFill>
-          <a:ln>
-            <a:noFill/>
-          </a:ln>
-          <a:effectLst/>
-        </p:spPr>
-        <p:style>
-          <a:lnRef idx="1">
-            <a:schemeClr val="accent1"/>
-          </a:lnRef>
-          <a:fillRef idx="3">
-            <a:schemeClr val="accent1"/>
-          </a:fillRef>
-          <a:effectRef idx="2">
-            <a:schemeClr val="accent1"/>
-          </a:effectRef>
-          <a:fontRef idx="minor">
-            <a:schemeClr val="lt1"/>
-          </a:fontRef>
-        </p:style>
-        <p:txBody>
-          <a:bodyPr rtlCol="0" anchor="ctr"/>
-          <a:lstStyle/>
-          <a:p>
-            <a:pPr algn="ctr"/>
-          </a:p>
-        </p:txBody>
-      </p:sp>
-      <p:sp>
-        <p:nvSpPr>
-          <p:cNvPr id="16" name="Rectangle 15"/>
-          <p:cNvSpPr/>
-          <p:nvPr/>
-        </p:nvSpPr>
-        <p:spPr>
-          <a:xfrm>
-            <a:off x="9464040" y="3182112"/>
-            <a:ext cx="1463040" cy="2304288"/>
-          </a:xfrm>
-          <a:prstGeom prst="rect">
-            <a:avLst/>
-          </a:prstGeom>
-          <a:solidFill>
-            <a:srgbClr val="2E5E8E"/>
-          </a:solidFill>
-          <a:ln>
-            <a:noFill/>
-          </a:ln>
-          <a:effectLst/>
-        </p:spPr>
-        <p:style>
-          <a:lnRef idx="1">
-            <a:schemeClr val="accent1"/>
-          </a:lnRef>
-          <a:fillRef idx="3">
-            <a:schemeClr val="accent1"/>
-          </a:fillRef>
-          <a:effectRef idx="2">
-            <a:schemeClr val="accent1"/>
-          </a:effectRef>
-          <a:fontRef idx="minor">
-            <a:schemeClr val="lt1"/>
-          </a:fontRef>
-        </p:style>
-        <p:txBody>
-          <a:bodyPr rtlCol="0" anchor="ctr"/>
-          <a:lstStyle/>
-          <a:p>
-            <a:pPr algn="ctr"/>
-          </a:p>
-        </p:txBody>
-      </p:sp>
-      <p:sp>
-        <p:nvSpPr>
-          <p:cNvPr id="17" name="Rounded Rectangle 16"/>
-          <p:cNvSpPr/>
-          <p:nvPr/>
-        </p:nvSpPr>
-        <p:spPr>
-          <a:xfrm>
-            <a:off x="9464040" y="2798064"/>
-            <a:ext cx="1463040" cy="384047"/>
-          </a:xfrm>
-          <a:prstGeom prst="roundRect">
-            <a:avLst>
-              <a:gd name="adj" fmla="val 0"/>
-            </a:avLst>
-          </a:prstGeom>
-          <a:noFill/>
-          <a:ln w="17780">
-            <a:solidFill>
-              <a:srgbClr val="2E5E8E"/>
-            </a:solidFill>
-            <a:prstDash val="dash"/>
-          </a:ln>
-          <a:effectLst/>
-        </p:spPr>
-        <p:style>
-          <a:lnRef idx="1">
-            <a:schemeClr val="accent1"/>
-          </a:lnRef>
-          <a:fillRef idx="3">
-            <a:schemeClr val="accent1"/>
-          </a:fillRef>
-          <a:effectRef idx="2">
-            <a:schemeClr val="accent1"/>
-          </a:effectRef>
-          <a:fontRef idx="minor">
-            <a:schemeClr val="lt1"/>
-          </a:fontRef>
-        </p:style>
-        <p:txBody>
-          <a:bodyPr rtlCol="0" anchor="ctr"/>
-          <a:lstStyle/>
-          <a:p>
-            <a:pPr algn="ctr"/>
-          </a:p>
-        </p:txBody>
-      </p:sp>
-      <p:sp>
-        <p:nvSpPr>
-          <p:cNvPr id="18" name="TextBox 17"/>
-          <p:cNvSpPr txBox="1"/>
-          <p:nvPr/>
-        </p:nvSpPr>
-        <p:spPr>
-          <a:xfrm>
-            <a:off x="6903720" y="1142999"/>
-            <a:ext cx="1828800" cy="457200"/>
-          </a:xfrm>
-          <a:prstGeom prst="rect">
-            <a:avLst/>
-          </a:prstGeom>
-          <a:noFill/>
-        </p:spPr>
-        <p:txBody>
-          <a:bodyPr wrap="square" anchor="ctr" lIns="73152" rIns="73152" tIns="27432" bIns="27432">
-            <a:spAutoFit/>
-          </a:bodyPr>
-          <a:lstStyle/>
-          <a:p>
-            <a:pPr algn="ctr"/>
-            <a:r>
-              <a:rPr sz="1800" b="1">
+              <a:t>週5,000億超</a:t>
+            </a:r>
+          </a:p>
+          <a:p>
+            <a:pPr algn="ctr"/>
+            <a:r>
+              <a:rPr sz="1600" b="0">
                 <a:solidFill>
                   <a:srgbClr val="1F3A5C"/>
                 </a:solidFill>
                 <a:latin typeface="Noto Sans CJK JP"/>
                 <a:ea typeface="Noto Sans CJK JP"/>
               </a:rPr>
-              <a:t>100</a:t>
-            </a:r>
-          </a:p>
-        </p:txBody>
-      </p:sp>
-      <p:sp>
-        <p:nvSpPr>
-          <p:cNvPr id="19" name="TextBox 18"/>
-          <p:cNvSpPr txBox="1"/>
-          <p:nvPr/>
-        </p:nvSpPr>
-        <p:spPr>
-          <a:xfrm>
-            <a:off x="9098280" y="2249424"/>
-            <a:ext cx="2194560" cy="502920"/>
-          </a:xfrm>
-          <a:prstGeom prst="rect">
-            <a:avLst/>
-          </a:prstGeom>
-          <a:noFill/>
-        </p:spPr>
-        <p:txBody>
-          <a:bodyPr wrap="square" anchor="ctr" lIns="73152" rIns="73152" tIns="27432" bIns="27432">
-            <a:spAutoFit/>
-          </a:bodyPr>
-          <a:lstStyle/>
-          <a:p>
-            <a:pPr algn="ctr"/>
-            <a:r>
-              <a:rPr sz="2000" b="1">
-                <a:solidFill>
-                  <a:srgbClr val="C0392B"/>
+              <a:t>身元が確認されたボットの</a:t>
+            </a:r>
+          </a:p>
+          <a:p>
+            <a:pPr algn="ctr"/>
+            <a:r>
+              <a:rPr sz="1600" b="0">
+                <a:solidFill>
+                  <a:srgbClr val="1F3A5C"/>
                 </a:solidFill>
                 <a:latin typeface="Noto Sans CJK JP"/>
                 <a:ea typeface="Noto Sans CJK JP"/>
               </a:rPr>
-              <a:t>3〜4割減</a:t>
-            </a:r>
-          </a:p>
-        </p:txBody>
-      </p:sp>
-      <p:cxnSp>
-        <p:nvCxnSpPr>
-          <p:cNvPr id="20" name="Connector 19"/>
-          <p:cNvCxnSpPr/>
-          <p:nvPr/>
-        </p:nvCxnSpPr>
-        <p:spPr>
-          <a:xfrm>
-            <a:off x="6629400" y="5486400"/>
-            <a:ext cx="4754880" cy="0"/>
-          </a:xfrm>
-          <a:prstGeom prst="line">
-            <a:avLst/>
-          </a:prstGeom>
-          <a:ln>
-            <a:solidFill>
-              <a:srgbClr val="6B7280"/>
-            </a:solidFill>
-          </a:ln>
-        </p:spPr>
-        <p:style>
-          <a:lnRef idx="2">
-            <a:schemeClr val="accent1"/>
-          </a:lnRef>
-          <a:fillRef idx="0">
-            <a:schemeClr val="accent1"/>
-          </a:fillRef>
-          <a:effectRef idx="1">
-            <a:schemeClr val="accent1"/>
-          </a:effectRef>
-          <a:fontRef idx="minor">
-            <a:schemeClr val="tx1"/>
-          </a:fontRef>
-        </p:style>
-      </p:cxnSp>
-      <p:sp>
-        <p:nvSpPr>
-          <p:cNvPr id="21" name="TextBox 20"/>
-          <p:cNvSpPr txBox="1"/>
-          <p:nvPr/>
-        </p:nvSpPr>
-        <p:spPr>
-          <a:xfrm>
-            <a:off x="6903720" y="5577840"/>
-            <a:ext cx="1828800" cy="411480"/>
-          </a:xfrm>
-          <a:prstGeom prst="rect">
-            <a:avLst/>
-          </a:prstGeom>
-          <a:noFill/>
-        </p:spPr>
-        <p:txBody>
-          <a:bodyPr wrap="square" anchor="ctr" lIns="73152" rIns="73152" tIns="27432" bIns="27432">
-            <a:spAutoFit/>
-          </a:bodyPr>
-          <a:lstStyle/>
-          <a:p>
-            <a:pPr algn="ctr"/>
-            <a:r>
-              <a:rPr sz="1600" b="0">
-                <a:solidFill>
-                  <a:srgbClr val="1F3A5C"/>
-                </a:solidFill>
-                <a:latin typeface="Noto Sans CJK JP"/>
-                <a:ea typeface="Noto Sans CJK JP"/>
-              </a:rPr>
-              <a:t>以前</a:t>
-            </a:r>
-          </a:p>
-        </p:txBody>
-      </p:sp>
-      <p:sp>
-        <p:nvSpPr>
-          <p:cNvPr id="22" name="TextBox 21"/>
-          <p:cNvSpPr txBox="1"/>
-          <p:nvPr/>
-        </p:nvSpPr>
-        <p:spPr>
-          <a:xfrm>
-            <a:off x="9281160" y="5577840"/>
-            <a:ext cx="1828800" cy="411480"/>
-          </a:xfrm>
-          <a:prstGeom prst="rect">
-            <a:avLst/>
-          </a:prstGeom>
-          <a:noFill/>
-        </p:spPr>
-        <p:txBody>
-          <a:bodyPr wrap="square" anchor="ctr" lIns="73152" rIns="73152" tIns="27432" bIns="27432">
-            <a:spAutoFit/>
-          </a:bodyPr>
-          <a:lstStyle/>
-          <a:p>
-            <a:pPr algn="ctr"/>
-            <a:r>
-              <a:rPr sz="1600" b="0">
-                <a:solidFill>
-                  <a:srgbClr val="1F3A5C"/>
-                </a:solidFill>
-                <a:latin typeface="Noto Sans CJK JP"/>
-                <a:ea typeface="Noto Sans CJK JP"/>
-              </a:rPr>
-              <a:t>現在</a:t>
+              <a:t>リクエスト</a:t>
             </a:r>
           </a:p>
         </p:txBody>
@@ -3979,8 +3998,228 @@
         </p:nvSpPr>
         <p:spPr>
           <a:xfrm>
-            <a:off x="457200" y="1783080"/>
-            <a:ext cx="2194560" cy="868680"/>
+            <a:off x="320040" y="2834640"/>
+            <a:ext cx="1783080" cy="1371600"/>
+          </a:xfrm>
+          <a:prstGeom prst="roundRect">
+            <a:avLst>
+              <a:gd name="adj" fmla="val 16000"/>
+            </a:avLst>
+          </a:prstGeom>
+          <a:solidFill>
+            <a:srgbClr val="2B3A4A"/>
+          </a:solidFill>
+          <a:ln>
+            <a:noFill/>
+          </a:ln>
+          <a:effectLst/>
+        </p:spPr>
+        <p:style>
+          <a:lnRef idx="1">
+            <a:schemeClr val="accent1"/>
+          </a:lnRef>
+          <a:fillRef idx="3">
+            <a:schemeClr val="accent1"/>
+          </a:fillRef>
+          <a:effectRef idx="2">
+            <a:schemeClr val="accent1"/>
+          </a:effectRef>
+          <a:fontRef idx="minor">
+            <a:schemeClr val="lt1"/>
+          </a:fontRef>
+        </p:style>
+        <p:txBody>
+          <a:bodyPr rtlCol="0" anchor="ctr" wrap="square" lIns="73152" rIns="73152" tIns="27432" bIns="27432"/>
+          <a:lstStyle/>
+          <a:p>
+            <a:pPr algn="ctr"/>
+            <a:r>
+              <a:rPr sz="1800" b="1">
+                <a:solidFill>
+                  <a:srgbClr val="FFFFFF"/>
+                </a:solidFill>
+                <a:latin typeface="Noto Sans CJK JP"/>
+                <a:ea typeface="Noto Sans CJK JP"/>
+              </a:rPr>
+              <a:t>エージェント</a:t>
+            </a:r>
+          </a:p>
+          <a:p>
+            <a:pPr algn="ctr"/>
+            <a:r>
+              <a:rPr sz="1600" b="0">
+                <a:solidFill>
+                  <a:srgbClr val="FFFFFF"/>
+                </a:solidFill>
+                <a:latin typeface="Noto Sans CJK JP"/>
+                <a:ea typeface="Noto Sans CJK JP"/>
+              </a:rPr>
+              <a:t>コードを書いた</a:t>
+            </a:r>
+          </a:p>
+        </p:txBody>
+      </p:sp>
+      <p:sp>
+        <p:nvSpPr>
+          <p:cNvPr id="3" name="Rounded Rectangle 2"/>
+          <p:cNvSpPr/>
+          <p:nvPr/>
+        </p:nvSpPr>
+        <p:spPr>
+          <a:xfrm>
+            <a:off x="2560320" y="594360"/>
+            <a:ext cx="9418320" cy="2743200"/>
+          </a:xfrm>
+          <a:prstGeom prst="roundRect">
+            <a:avLst>
+              <a:gd name="adj" fmla="val 5000"/>
+            </a:avLst>
+          </a:prstGeom>
+          <a:solidFill>
+            <a:srgbClr val="EEF3F9"/>
+          </a:solidFill>
+          <a:ln w="20320">
+            <a:solidFill>
+              <a:srgbClr val="2E5E8E"/>
+            </a:solidFill>
+          </a:ln>
+          <a:effectLst/>
+        </p:spPr>
+        <p:style>
+          <a:lnRef idx="1">
+            <a:schemeClr val="accent1"/>
+          </a:lnRef>
+          <a:fillRef idx="3">
+            <a:schemeClr val="accent1"/>
+          </a:fillRef>
+          <a:effectRef idx="2">
+            <a:schemeClr val="accent1"/>
+          </a:effectRef>
+          <a:fontRef idx="minor">
+            <a:schemeClr val="lt1"/>
+          </a:fontRef>
+        </p:style>
+        <p:txBody>
+          <a:bodyPr rtlCol="0" anchor="ctr"/>
+          <a:lstStyle/>
+          <a:p>
+            <a:pPr algn="ctr"/>
+          </a:p>
+        </p:txBody>
+      </p:sp>
+      <p:sp>
+        <p:nvSpPr>
+          <p:cNvPr id="4" name="Rounded Rectangle 3"/>
+          <p:cNvSpPr/>
+          <p:nvPr/>
+        </p:nvSpPr>
+        <p:spPr>
+          <a:xfrm>
+            <a:off x="2834639" y="356616"/>
+            <a:ext cx="3291840" cy="475488"/>
+          </a:xfrm>
+          <a:prstGeom prst="roundRect">
+            <a:avLst>
+              <a:gd name="adj" fmla="val 50000"/>
+            </a:avLst>
+          </a:prstGeom>
+          <a:solidFill>
+            <a:srgbClr val="2E5E8E"/>
+          </a:solidFill>
+          <a:ln>
+            <a:noFill/>
+          </a:ln>
+          <a:effectLst/>
+        </p:spPr>
+        <p:style>
+          <a:lnRef idx="1">
+            <a:schemeClr val="accent1"/>
+          </a:lnRef>
+          <a:fillRef idx="3">
+            <a:schemeClr val="accent1"/>
+          </a:fillRef>
+          <a:effectRef idx="2">
+            <a:schemeClr val="accent1"/>
+          </a:effectRef>
+          <a:fontRef idx="minor">
+            <a:schemeClr val="lt1"/>
+          </a:fontRef>
+        </p:style>
+        <p:txBody>
+          <a:bodyPr rtlCol="0" anchor="ctr" wrap="square" lIns="73152" rIns="73152" tIns="27432" bIns="27432"/>
+          <a:lstStyle/>
+          <a:p>
+            <a:pPr algn="ctr"/>
+            <a:r>
+              <a:rPr sz="1800" b="1">
+                <a:solidFill>
+                  <a:srgbClr val="FFFFFF"/>
+                </a:solidFill>
+                <a:latin typeface="Noto Sans CJK JP"/>
+                <a:ea typeface="Noto Sans CJK JP"/>
+              </a:rPr>
+              <a:t>従来：コンテナで隔離</a:t>
+            </a:r>
+          </a:p>
+        </p:txBody>
+      </p:sp>
+      <p:sp>
+        <p:nvSpPr>
+          <p:cNvPr id="5" name="Rounded Rectangle 4"/>
+          <p:cNvSpPr/>
+          <p:nvPr/>
+        </p:nvSpPr>
+        <p:spPr>
+          <a:xfrm>
+            <a:off x="2697480" y="1051560"/>
+            <a:ext cx="4526280" cy="1737360"/>
+          </a:xfrm>
+          <a:prstGeom prst="roundRect">
+            <a:avLst>
+              <a:gd name="adj" fmla="val 10000"/>
+            </a:avLst>
+          </a:prstGeom>
+          <a:noFill/>
+          <a:ln w="17780">
+            <a:solidFill>
+              <a:srgbClr val="C0392B"/>
+            </a:solidFill>
+            <a:prstDash val="dash"/>
+          </a:ln>
+          <a:effectLst/>
+        </p:spPr>
+        <p:style>
+          <a:lnRef idx="1">
+            <a:schemeClr val="accent1"/>
+          </a:lnRef>
+          <a:fillRef idx="3">
+            <a:schemeClr val="accent1"/>
+          </a:fillRef>
+          <a:effectRef idx="2">
+            <a:schemeClr val="accent1"/>
+          </a:effectRef>
+          <a:fontRef idx="minor">
+            <a:schemeClr val="lt1"/>
+          </a:fontRef>
+        </p:style>
+        <p:txBody>
+          <a:bodyPr rtlCol="0" anchor="ctr"/>
+          <a:lstStyle/>
+          <a:p>
+            <a:pPr algn="ctr"/>
+          </a:p>
+        </p:txBody>
+      </p:sp>
+      <p:sp>
+        <p:nvSpPr>
+          <p:cNvPr id="6" name="Rounded Rectangle 5"/>
+          <p:cNvSpPr/>
+          <p:nvPr/>
+        </p:nvSpPr>
+        <p:spPr>
+          <a:xfrm>
+            <a:off x="2788920" y="1234440"/>
+            <a:ext cx="2011680" cy="1371600"/>
           </a:xfrm>
           <a:prstGeom prst="roundRect">
             <a:avLst>
@@ -4024,34 +4263,34 @@
                 <a:latin typeface="Noto Sans CJK JP"/>
                 <a:ea typeface="Noto Sans CJK JP"/>
               </a:rPr>
-              <a:t>コード1</a:t>
-            </a:r>
-          </a:p>
-          <a:p>
-            <a:pPr algn="ctr"/>
-            <a:r>
-              <a:rPr sz="1500" b="0">
+              <a:t>コンテナを作る</a:t>
+            </a:r>
+          </a:p>
+          <a:p>
+            <a:pPr algn="ctr"/>
+            <a:r>
+              <a:rPr sz="1600" b="0">
                 <a:solidFill>
                   <a:srgbClr val="6B7280"/>
                 </a:solidFill>
                 <a:latin typeface="Noto Sans CJK JP"/>
                 <a:ea typeface="Noto Sans CJK JP"/>
               </a:rPr>
-              <a:t>エージェントが作成</a:t>
-            </a:r>
-          </a:p>
-        </p:txBody>
-      </p:sp>
-      <p:sp>
-        <p:nvSpPr>
-          <p:cNvPr id="3" name="Rounded Rectangle 2"/>
+              <a:t>OSの環境を用意</a:t>
+            </a:r>
+          </a:p>
+        </p:txBody>
+      </p:sp>
+      <p:sp>
+        <p:nvSpPr>
+          <p:cNvPr id="7" name="Rounded Rectangle 6"/>
           <p:cNvSpPr/>
           <p:nvPr/>
         </p:nvSpPr>
         <p:spPr>
           <a:xfrm>
-            <a:off x="457200" y="3200400"/>
-            <a:ext cx="2194560" cy="868680"/>
+            <a:off x="5120640" y="1234440"/>
+            <a:ext cx="2011680" cy="1371600"/>
           </a:xfrm>
           <a:prstGeom prst="roundRect">
             <a:avLst>
@@ -4095,34 +4334,34 @@
                 <a:latin typeface="Noto Sans CJK JP"/>
                 <a:ea typeface="Noto Sans CJK JP"/>
               </a:rPr>
-              <a:t>コード2</a:t>
-            </a:r>
-          </a:p>
-          <a:p>
-            <a:pPr algn="ctr"/>
-            <a:r>
-              <a:rPr sz="1500" b="0">
+              <a:t>ランタイム起動</a:t>
+            </a:r>
+          </a:p>
+          <a:p>
+            <a:pPr algn="ctr"/>
+            <a:r>
+              <a:rPr sz="1600" b="0">
                 <a:solidFill>
                   <a:srgbClr val="6B7280"/>
                 </a:solidFill>
                 <a:latin typeface="Noto Sans CJK JP"/>
                 <a:ea typeface="Noto Sans CJK JP"/>
               </a:rPr>
-              <a:t>エージェントが作成</a:t>
-            </a:r>
-          </a:p>
-        </p:txBody>
-      </p:sp>
-      <p:sp>
-        <p:nvSpPr>
-          <p:cNvPr id="4" name="Rounded Rectangle 3"/>
+              <a:t>Node.js など</a:t>
+            </a:r>
+          </a:p>
+        </p:txBody>
+      </p:sp>
+      <p:sp>
+        <p:nvSpPr>
+          <p:cNvPr id="8" name="Rounded Rectangle 7"/>
           <p:cNvSpPr/>
           <p:nvPr/>
         </p:nvSpPr>
         <p:spPr>
           <a:xfrm>
-            <a:off x="457200" y="4617720"/>
-            <a:ext cx="2194560" cy="868680"/>
+            <a:off x="7452360" y="1234440"/>
+            <a:ext cx="2011680" cy="1371600"/>
           </a:xfrm>
           <a:prstGeom prst="roundRect">
             <a:avLst>
@@ -4166,46 +4405,46 @@
                 <a:latin typeface="Noto Sans CJK JP"/>
                 <a:ea typeface="Noto Sans CJK JP"/>
               </a:rPr>
-              <a:t>コード3</a:t>
-            </a:r>
-          </a:p>
-          <a:p>
-            <a:pPr algn="ctr"/>
-            <a:r>
-              <a:rPr sz="1500" b="0">
+              <a:t>コードを実行</a:t>
+            </a:r>
+          </a:p>
+          <a:p>
+            <a:pPr algn="ctr"/>
+            <a:r>
+              <a:rPr sz="1600" b="0">
                 <a:solidFill>
                   <a:srgbClr val="6B7280"/>
                 </a:solidFill>
                 <a:latin typeface="Noto Sans CJK JP"/>
                 <a:ea typeface="Noto Sans CJK JP"/>
               </a:rPr>
-              <a:t>エージェントが作成</a:t>
-            </a:r>
-          </a:p>
-        </p:txBody>
-      </p:sp>
-      <p:sp>
-        <p:nvSpPr>
-          <p:cNvPr id="5" name="Rounded Rectangle 4"/>
+              <a:t>コンテナの中で</a:t>
+            </a:r>
+          </a:p>
+        </p:txBody>
+      </p:sp>
+      <p:sp>
+        <p:nvSpPr>
+          <p:cNvPr id="9" name="Rounded Rectangle 8"/>
           <p:cNvSpPr/>
           <p:nvPr/>
         </p:nvSpPr>
         <p:spPr>
           <a:xfrm>
-            <a:off x="4206240" y="777240"/>
-            <a:ext cx="7543800" cy="5715000"/>
+            <a:off x="9784080" y="1234440"/>
+            <a:ext cx="2011680" cy="1371600"/>
           </a:xfrm>
           <a:prstGeom prst="roundRect">
             <a:avLst>
-              <a:gd name="adj" fmla="val 5000"/>
+              <a:gd name="adj" fmla="val 16000"/>
             </a:avLst>
           </a:prstGeom>
           <a:solidFill>
-            <a:srgbClr val="F3F4F6"/>
+            <a:srgbClr val="FBECEA"/>
           </a:solidFill>
-          <a:ln w="20320">
+          <a:ln w="17780">
             <a:solidFill>
-              <a:srgbClr val="2B3A4A"/>
+              <a:srgbClr val="C0392B"/>
             </a:solidFill>
           </a:ln>
           <a:effectLst/>
@@ -4225,52 +4464,6 @@
           </a:fontRef>
         </p:style>
         <p:txBody>
-          <a:bodyPr rtlCol="0" anchor="ctr"/>
-          <a:lstStyle/>
-          <a:p>
-            <a:pPr algn="ctr"/>
-          </a:p>
-        </p:txBody>
-      </p:sp>
-      <p:sp>
-        <p:nvSpPr>
-          <p:cNvPr id="6" name="Rounded Rectangle 5"/>
-          <p:cNvSpPr/>
-          <p:nvPr/>
-        </p:nvSpPr>
-        <p:spPr>
-          <a:xfrm>
-            <a:off x="4480559" y="539496"/>
-            <a:ext cx="2468880" cy="475488"/>
-          </a:xfrm>
-          <a:prstGeom prst="roundRect">
-            <a:avLst>
-              <a:gd name="adj" fmla="val 50000"/>
-            </a:avLst>
-          </a:prstGeom>
-          <a:solidFill>
-            <a:srgbClr val="2B3A4A"/>
-          </a:solidFill>
-          <a:ln>
-            <a:noFill/>
-          </a:ln>
-          <a:effectLst/>
-        </p:spPr>
-        <p:style>
-          <a:lnRef idx="1">
-            <a:schemeClr val="accent1"/>
-          </a:lnRef>
-          <a:fillRef idx="3">
-            <a:schemeClr val="accent1"/>
-          </a:fillRef>
-          <a:effectRef idx="2">
-            <a:schemeClr val="accent1"/>
-          </a:effectRef>
-          <a:fontRef idx="minor">
-            <a:schemeClr val="lt1"/>
-          </a:fontRef>
-        </p:style>
-        <p:txBody>
           <a:bodyPr rtlCol="0" anchor="ctr" wrap="square" lIns="73152" rIns="73152" tIns="27432" bIns="27432"/>
           <a:lstStyle/>
           <a:p>
@@ -4278,26 +4471,88 @@
             <a:r>
               <a:rPr sz="1800" b="1">
                 <a:solidFill>
-                  <a:srgbClr val="FFFFFF"/>
+                  <a:srgbClr val="C0392B"/>
                 </a:solidFill>
                 <a:latin typeface="Noto Sans CJK JP"/>
                 <a:ea typeface="Noto Sans CJK JP"/>
               </a:rPr>
-              <a:t>1台のサーバー</a:t>
-            </a:r>
-          </a:p>
-        </p:txBody>
-      </p:sp>
-      <p:sp>
-        <p:nvSpPr>
-          <p:cNvPr id="7" name="Rounded Rectangle 6"/>
+              <a:t>数百ミリ秒</a:t>
+            </a:r>
+          </a:p>
+          <a:p>
+            <a:pPr algn="ctr"/>
+            <a:r>
+              <a:rPr sz="1500" b="0">
+                <a:solidFill>
+                  <a:srgbClr val="1F3A5C"/>
+                </a:solidFill>
+                <a:latin typeface="Noto Sans CJK JP"/>
+                <a:ea typeface="Noto Sans CJK JP"/>
+              </a:rPr>
+              <a:t>メモリ 数百MB</a:t>
+            </a:r>
+          </a:p>
+          <a:p>
+            <a:pPr algn="ctr"/>
+            <a:r>
+              <a:rPr sz="1500" b="0">
+                <a:solidFill>
+                  <a:srgbClr val="1F3A5C"/>
+                </a:solidFill>
+                <a:latin typeface="Noto Sans CJK JP"/>
+                <a:ea typeface="Noto Sans CJK JP"/>
+              </a:rPr>
+              <a:t>同時数に上限</a:t>
+            </a:r>
+          </a:p>
+        </p:txBody>
+      </p:sp>
+      <p:sp>
+        <p:nvSpPr>
+          <p:cNvPr id="10" name="TextBox 9"/>
+          <p:cNvSpPr txBox="1"/>
+          <p:nvPr/>
+        </p:nvSpPr>
+        <p:spPr>
+          <a:xfrm>
+            <a:off x="2697480" y="2834640"/>
+            <a:ext cx="4526280" cy="411480"/>
+          </a:xfrm>
+          <a:prstGeom prst="rect">
+            <a:avLst/>
+          </a:prstGeom>
+          <a:noFill/>
+        </p:spPr>
+        <p:txBody>
+          <a:bodyPr wrap="square" anchor="ctr" lIns="73152" rIns="73152" tIns="27432" bIns="27432">
+            <a:spAutoFit/>
+          </a:bodyPr>
+          <a:lstStyle/>
+          <a:p>
+            <a:pPr algn="ctr"/>
+            <a:r>
+              <a:rPr sz="1600" b="1">
+                <a:solidFill>
+                  <a:srgbClr val="C0392B"/>
+                </a:solidFill>
+                <a:latin typeface="Noto Sans CJK JP"/>
+                <a:ea typeface="Noto Sans CJK JP"/>
+              </a:rPr>
+              <a:t>依頼のたびに毎回やる準備</a:t>
+            </a:r>
+          </a:p>
+        </p:txBody>
+      </p:sp>
+      <p:sp>
+        <p:nvSpPr>
+          <p:cNvPr id="11" name="Rounded Rectangle 10"/>
           <p:cNvSpPr/>
           <p:nvPr/>
         </p:nvSpPr>
         <p:spPr>
           <a:xfrm>
-            <a:off x="4480560" y="1325880"/>
-            <a:ext cx="6995160" cy="4846320"/>
+            <a:off x="2560320" y="3749039"/>
+            <a:ext cx="9418320" cy="2880360"/>
           </a:xfrm>
           <a:prstGeom prst="roundRect">
             <a:avLst>
@@ -4338,14 +4593,14 @@
       </p:sp>
       <p:sp>
         <p:nvSpPr>
-          <p:cNvPr id="8" name="Rounded Rectangle 7"/>
+          <p:cNvPr id="12" name="Rounded Rectangle 11"/>
           <p:cNvSpPr/>
           <p:nvPr/>
         </p:nvSpPr>
         <p:spPr>
           <a:xfrm>
-            <a:off x="4754880" y="1088136"/>
-            <a:ext cx="4023360" cy="475488"/>
+            <a:off x="2834639" y="3511296"/>
+            <a:ext cx="5852160" cy="475488"/>
           </a:xfrm>
           <a:prstGeom prst="roundRect">
             <a:avLst>
@@ -4387,21 +4642,68 @@
                 <a:latin typeface="Noto Sans CJK JP"/>
                 <a:ea typeface="Noto Sans CJK JP"/>
               </a:rPr>
-              <a:t>ランタイム（1つのプロセス）</a:t>
-            </a:r>
-          </a:p>
-        </p:txBody>
-      </p:sp>
-      <p:sp>
-        <p:nvSpPr>
-          <p:cNvPr id="9" name="Rounded Rectangle 8"/>
+              <a:t>アイソレートで隔離（Dynamic Workers）</a:t>
+            </a:r>
+          </a:p>
+        </p:txBody>
+      </p:sp>
+      <p:sp>
+        <p:nvSpPr>
+          <p:cNvPr id="13" name="Rounded Rectangle 12"/>
           <p:cNvSpPr/>
           <p:nvPr/>
         </p:nvSpPr>
         <p:spPr>
           <a:xfrm>
-            <a:off x="4846320" y="1783080"/>
-            <a:ext cx="3749039" cy="868680"/>
+            <a:off x="2697480" y="4206240"/>
+            <a:ext cx="6858000" cy="1737360"/>
+          </a:xfrm>
+          <a:prstGeom prst="roundRect">
+            <a:avLst>
+              <a:gd name="adj" fmla="val 10000"/>
+            </a:avLst>
+          </a:prstGeom>
+          <a:noFill/>
+          <a:ln w="17780">
+            <a:solidFill>
+              <a:srgbClr val="1E8A82"/>
+            </a:solidFill>
+            <a:prstDash val="dash"/>
+          </a:ln>
+          <a:effectLst/>
+        </p:spPr>
+        <p:style>
+          <a:lnRef idx="1">
+            <a:schemeClr val="accent1"/>
+          </a:lnRef>
+          <a:fillRef idx="3">
+            <a:schemeClr val="accent1"/>
+          </a:fillRef>
+          <a:effectRef idx="2">
+            <a:schemeClr val="accent1"/>
+          </a:effectRef>
+          <a:fontRef idx="minor">
+            <a:schemeClr val="lt1"/>
+          </a:fontRef>
+        </p:style>
+        <p:txBody>
+          <a:bodyPr rtlCol="0" anchor="ctr"/>
+          <a:lstStyle/>
+          <a:p>
+            <a:pPr algn="ctr"/>
+          </a:p>
+        </p:txBody>
+      </p:sp>
+      <p:sp>
+        <p:nvSpPr>
+          <p:cNvPr id="14" name="Rounded Rectangle 13"/>
+          <p:cNvSpPr/>
+          <p:nvPr/>
+        </p:nvSpPr>
+        <p:spPr>
+          <a:xfrm>
+            <a:off x="2788920" y="4389120"/>
+            <a:ext cx="2011680" cy="1371600"/>
           </a:xfrm>
           <a:prstGeom prst="roundRect">
             <a:avLst>
@@ -4445,7 +4747,7 @@
                 <a:latin typeface="Noto Sans CJK JP"/>
                 <a:ea typeface="Noto Sans CJK JP"/>
               </a:rPr>
-              <a:t>アイソレート1</a:t>
+              <a:t>親Worker</a:t>
             </a:r>
           </a:p>
           <a:p>
@@ -4458,57 +4760,21 @@
                 <a:latin typeface="Noto Sans CJK JP"/>
                 <a:ea typeface="Noto Sans CJK JP"/>
               </a:rPr>
-              <a:t>専用のメモリと変数</a:t>
-            </a:r>
-          </a:p>
-        </p:txBody>
-      </p:sp>
-      <p:cxnSp>
-        <p:nvCxnSpPr>
-          <p:cNvPr id="10" name="Connector 9"/>
-          <p:cNvCxnSpPr/>
-          <p:nvPr/>
-        </p:nvCxnSpPr>
-        <p:spPr>
-          <a:xfrm>
-            <a:off x="2651760" y="2217420"/>
-            <a:ext cx="2194560" cy="0"/>
-          </a:xfrm>
-          <a:prstGeom prst="line">
-            <a:avLst/>
-          </a:prstGeom>
-          <a:ln w="19050">
-            <a:solidFill>
-              <a:srgbClr val="6B7280"/>
-            </a:solidFill>
-            <a:tailEnd type="triangle" w="med" len="med"/>
-          </a:ln>
-        </p:spPr>
-        <p:style>
-          <a:lnRef idx="2">
-            <a:schemeClr val="accent1"/>
-          </a:lnRef>
-          <a:fillRef idx="0">
-            <a:schemeClr val="accent1"/>
-          </a:fillRef>
-          <a:effectRef idx="1">
-            <a:schemeClr val="accent1"/>
-          </a:effectRef>
-          <a:fontRef idx="minor">
-            <a:schemeClr val="tx1"/>
-          </a:fontRef>
-        </p:style>
-      </p:cxnSp>
-      <p:sp>
-        <p:nvSpPr>
-          <p:cNvPr id="11" name="Rounded Rectangle 10"/>
+              <a:t>エージェント本体</a:t>
+            </a:r>
+          </a:p>
+        </p:txBody>
+      </p:sp>
+      <p:sp>
+        <p:nvSpPr>
+          <p:cNvPr id="15" name="Rounded Rectangle 14"/>
           <p:cNvSpPr/>
           <p:nvPr/>
         </p:nvSpPr>
         <p:spPr>
           <a:xfrm>
-            <a:off x="4846320" y="3200400"/>
-            <a:ext cx="3749039" cy="868680"/>
+            <a:off x="5120640" y="4389120"/>
+            <a:ext cx="2011680" cy="1371600"/>
           </a:xfrm>
           <a:prstGeom prst="roundRect">
             <a:avLst>
@@ -4552,7 +4818,7 @@
                 <a:latin typeface="Noto Sans CJK JP"/>
                 <a:ea typeface="Noto Sans CJK JP"/>
               </a:rPr>
-              <a:t>アイソレート2</a:t>
+              <a:t>アイソレート</a:t>
             </a:r>
           </a:p>
           <a:p>
@@ -4565,57 +4831,21 @@
                 <a:latin typeface="Noto Sans CJK JP"/>
                 <a:ea typeface="Noto Sans CJK JP"/>
               </a:rPr>
-              <a:t>専用のメモリと変数</a:t>
-            </a:r>
-          </a:p>
-        </p:txBody>
-      </p:sp>
-      <p:cxnSp>
-        <p:nvCxnSpPr>
-          <p:cNvPr id="12" name="Connector 11"/>
-          <p:cNvCxnSpPr/>
-          <p:nvPr/>
-        </p:nvCxnSpPr>
-        <p:spPr>
-          <a:xfrm>
-            <a:off x="2651760" y="3634740"/>
-            <a:ext cx="2194560" cy="0"/>
-          </a:xfrm>
-          <a:prstGeom prst="line">
-            <a:avLst/>
-          </a:prstGeom>
-          <a:ln w="19050">
-            <a:solidFill>
-              <a:srgbClr val="6B7280"/>
-            </a:solidFill>
-            <a:tailEnd type="triangle" w="med" len="med"/>
-          </a:ln>
-        </p:spPr>
-        <p:style>
-          <a:lnRef idx="2">
-            <a:schemeClr val="accent1"/>
-          </a:lnRef>
-          <a:fillRef idx="0">
-            <a:schemeClr val="accent1"/>
-          </a:fillRef>
-          <a:effectRef idx="1">
-            <a:schemeClr val="accent1"/>
-          </a:effectRef>
-          <a:fontRef idx="minor">
-            <a:schemeClr val="tx1"/>
-          </a:fontRef>
-        </p:style>
-      </p:cxnSp>
-      <p:sp>
-        <p:nvSpPr>
-          <p:cNvPr id="13" name="Rounded Rectangle 12"/>
+              <a:t>LOADER.load()</a:t>
+            </a:r>
+          </a:p>
+        </p:txBody>
+      </p:sp>
+      <p:sp>
+        <p:nvSpPr>
+          <p:cNvPr id="16" name="Rounded Rectangle 15"/>
           <p:cNvSpPr/>
           <p:nvPr/>
         </p:nvSpPr>
         <p:spPr>
           <a:xfrm>
-            <a:off x="4846320" y="4617720"/>
-            <a:ext cx="3749039" cy="868680"/>
+            <a:off x="7452360" y="4389120"/>
+            <a:ext cx="2011680" cy="1371600"/>
           </a:xfrm>
           <a:prstGeom prst="roundRect">
             <a:avLst>
@@ -4659,7 +4889,7 @@
                 <a:latin typeface="Noto Sans CJK JP"/>
                 <a:ea typeface="Noto Sans CJK JP"/>
               </a:rPr>
-              <a:t>アイソレート3</a:t>
+              <a:t>コードを実行</a:t>
             </a:r>
           </a:p>
           <a:p>
@@ -4672,21 +4902,141 @@
                 <a:latin typeface="Noto Sans CJK JP"/>
                 <a:ea typeface="Noto Sans CJK JP"/>
               </a:rPr>
-              <a:t>専用のメモリと変数</a:t>
+              <a:t>権限は親が制限</a:t>
+            </a:r>
+          </a:p>
+        </p:txBody>
+      </p:sp>
+      <p:sp>
+        <p:nvSpPr>
+          <p:cNvPr id="17" name="Rounded Rectangle 16"/>
+          <p:cNvSpPr/>
+          <p:nvPr/>
+        </p:nvSpPr>
+        <p:spPr>
+          <a:xfrm>
+            <a:off x="9784080" y="4389120"/>
+            <a:ext cx="2011680" cy="1371600"/>
+          </a:xfrm>
+          <a:prstGeom prst="roundRect">
+            <a:avLst>
+              <a:gd name="adj" fmla="val 16000"/>
+            </a:avLst>
+          </a:prstGeom>
+          <a:solidFill>
+            <a:srgbClr val="C9E8E4"/>
+          </a:solidFill>
+          <a:ln w="17780">
+            <a:solidFill>
+              <a:srgbClr val="1E8A82"/>
+            </a:solidFill>
+          </a:ln>
+          <a:effectLst/>
+        </p:spPr>
+        <p:style>
+          <a:lnRef idx="1">
+            <a:schemeClr val="accent1"/>
+          </a:lnRef>
+          <a:fillRef idx="3">
+            <a:schemeClr val="accent1"/>
+          </a:fillRef>
+          <a:effectRef idx="2">
+            <a:schemeClr val="accent1"/>
+          </a:effectRef>
+          <a:fontRef idx="minor">
+            <a:schemeClr val="lt1"/>
+          </a:fontRef>
+        </p:style>
+        <p:txBody>
+          <a:bodyPr rtlCol="0" anchor="ctr" wrap="square" lIns="73152" rIns="73152" tIns="27432" bIns="27432"/>
+          <a:lstStyle/>
+          <a:p>
+            <a:pPr algn="ctr"/>
+            <a:r>
+              <a:rPr sz="1800" b="1">
+                <a:solidFill>
+                  <a:srgbClr val="1E8A82"/>
+                </a:solidFill>
+                <a:latin typeface="Noto Sans CJK JP"/>
+                <a:ea typeface="Noto Sans CJK JP"/>
+              </a:rPr>
+              <a:t>数ミリ秒</a:t>
+            </a:r>
+          </a:p>
+          <a:p>
+            <a:pPr algn="ctr"/>
+            <a:r>
+              <a:rPr sz="1500" b="0">
+                <a:solidFill>
+                  <a:srgbClr val="1F3A5C"/>
+                </a:solidFill>
+                <a:latin typeface="Noto Sans CJK JP"/>
+                <a:ea typeface="Noto Sans CJK JP"/>
+              </a:rPr>
+              <a:t>メモリ 数MB</a:t>
+            </a:r>
+          </a:p>
+          <a:p>
+            <a:pPr algn="ctr"/>
+            <a:r>
+              <a:rPr sz="1500" b="0">
+                <a:solidFill>
+                  <a:srgbClr val="1F3A5C"/>
+                </a:solidFill>
+                <a:latin typeface="Noto Sans CJK JP"/>
+                <a:ea typeface="Noto Sans CJK JP"/>
+              </a:rPr>
+              <a:t>依頼ごとに作成</a:t>
+            </a:r>
+          </a:p>
+        </p:txBody>
+      </p:sp>
+      <p:sp>
+        <p:nvSpPr>
+          <p:cNvPr id="18" name="TextBox 17"/>
+          <p:cNvSpPr txBox="1"/>
+          <p:nvPr/>
+        </p:nvSpPr>
+        <p:spPr>
+          <a:xfrm>
+            <a:off x="2697480" y="5989320"/>
+            <a:ext cx="6858000" cy="411480"/>
+          </a:xfrm>
+          <a:prstGeom prst="rect">
+            <a:avLst/>
+          </a:prstGeom>
+          <a:noFill/>
+        </p:spPr>
+        <p:txBody>
+          <a:bodyPr wrap="square" anchor="ctr" lIns="73152" rIns="73152" tIns="27432" bIns="27432">
+            <a:spAutoFit/>
+          </a:bodyPr>
+          <a:lstStyle/>
+          <a:p>
+            <a:pPr algn="ctr"/>
+            <a:r>
+              <a:rPr sz="1600" b="1">
+                <a:solidFill>
+                  <a:srgbClr val="1E8A82"/>
+                </a:solidFill>
+                <a:latin typeface="Noto Sans CJK JP"/>
+                <a:ea typeface="Noto Sans CJK JP"/>
+              </a:rPr>
+              <a:t>すべて同じプロセスの中（ランタイムの準備は1回だけ）</a:t>
             </a:r>
           </a:p>
         </p:txBody>
       </p:sp>
       <p:cxnSp>
         <p:nvCxnSpPr>
-          <p:cNvPr id="14" name="Connector 13"/>
+          <p:cNvPr id="19" name="Connector 18"/>
           <p:cNvCxnSpPr/>
           <p:nvPr/>
         </p:nvCxnSpPr>
         <p:spPr>
           <a:xfrm>
-            <a:off x="2651760" y="5052059"/>
-            <a:ext cx="2194560" cy="0"/>
+            <a:off x="4800600" y="1920240"/>
+            <a:ext cx="320040" cy="0"/>
           </a:xfrm>
           <a:prstGeom prst="line">
             <a:avLst/>
@@ -4713,232 +5063,6 @@
           </a:fontRef>
         </p:style>
       </p:cxnSp>
-      <p:sp>
-        <p:nvSpPr>
-          <p:cNvPr id="15" name="TextBox 14"/>
-          <p:cNvSpPr txBox="1"/>
-          <p:nvPr/>
-        </p:nvSpPr>
-        <p:spPr>
-          <a:xfrm>
-            <a:off x="2633472" y="1741931"/>
-            <a:ext cx="1600200" cy="438912"/>
-          </a:xfrm>
-          <a:prstGeom prst="rect">
-            <a:avLst/>
-          </a:prstGeom>
-          <a:noFill/>
-        </p:spPr>
-        <p:txBody>
-          <a:bodyPr wrap="square" anchor="ctr" lIns="73152" rIns="73152" tIns="27432" bIns="27432">
-            <a:spAutoFit/>
-          </a:bodyPr>
-          <a:lstStyle/>
-          <a:p>
-            <a:pPr algn="ctr"/>
-            <a:r>
-              <a:rPr sz="1500" b="1">
-                <a:solidFill>
-                  <a:srgbClr val="1E8A82"/>
-                </a:solidFill>
-                <a:latin typeface="Noto Sans CJK JP"/>
-                <a:ea typeface="Noto Sans CJK JP"/>
-              </a:rPr>
-              <a:t>数ミリ秒で作成</a:t>
-            </a:r>
-          </a:p>
-        </p:txBody>
-      </p:sp>
-      <p:sp>
-        <p:nvSpPr>
-          <p:cNvPr id="16" name="TextBox 15"/>
-          <p:cNvSpPr txBox="1"/>
-          <p:nvPr/>
-        </p:nvSpPr>
-        <p:spPr>
-          <a:xfrm>
-            <a:off x="4846320" y="2715768"/>
-            <a:ext cx="3749039" cy="411480"/>
-          </a:xfrm>
-          <a:prstGeom prst="rect">
-            <a:avLst/>
-          </a:prstGeom>
-          <a:noFill/>
-        </p:spPr>
-        <p:txBody>
-          <a:bodyPr wrap="square" anchor="ctr" lIns="73152" rIns="73152" tIns="27432" bIns="27432">
-            <a:spAutoFit/>
-          </a:bodyPr>
-          <a:lstStyle/>
-          <a:p>
-            <a:pPr algn="ctr"/>
-            <a:r>
-              <a:rPr sz="1600" b="0">
-                <a:solidFill>
-                  <a:srgbClr val="C0392B"/>
-                </a:solidFill>
-                <a:latin typeface="Noto Sans CJK JP"/>
-                <a:ea typeface="Noto Sans CJK JP"/>
-              </a:rPr>
-              <a:t>✘ 互いのメモリは見えない</a:t>
-            </a:r>
-          </a:p>
-        </p:txBody>
-      </p:sp>
-      <p:sp>
-        <p:nvSpPr>
-          <p:cNvPr id="17" name="TextBox 16"/>
-          <p:cNvSpPr txBox="1"/>
-          <p:nvPr/>
-        </p:nvSpPr>
-        <p:spPr>
-          <a:xfrm>
-            <a:off x="4846320" y="4133088"/>
-            <a:ext cx="3749039" cy="411480"/>
-          </a:xfrm>
-          <a:prstGeom prst="rect">
-            <a:avLst/>
-          </a:prstGeom>
-          <a:noFill/>
-        </p:spPr>
-        <p:txBody>
-          <a:bodyPr wrap="square" anchor="ctr" lIns="73152" rIns="73152" tIns="27432" bIns="27432">
-            <a:spAutoFit/>
-          </a:bodyPr>
-          <a:lstStyle/>
-          <a:p>
-            <a:pPr algn="ctr"/>
-            <a:r>
-              <a:rPr sz="1600" b="0">
-                <a:solidFill>
-                  <a:srgbClr val="C0392B"/>
-                </a:solidFill>
-                <a:latin typeface="Noto Sans CJK JP"/>
-                <a:ea typeface="Noto Sans CJK JP"/>
-              </a:rPr>
-              <a:t>✘ 互いのメモリは見えない</a:t>
-            </a:r>
-          </a:p>
-        </p:txBody>
-      </p:sp>
-      <p:sp>
-        <p:nvSpPr>
-          <p:cNvPr id="18" name="TextBox 17"/>
-          <p:cNvSpPr txBox="1"/>
-          <p:nvPr/>
-        </p:nvSpPr>
-        <p:spPr>
-          <a:xfrm>
-            <a:off x="4846320" y="5532120"/>
-            <a:ext cx="3749039" cy="411480"/>
-          </a:xfrm>
-          <a:prstGeom prst="rect">
-            <a:avLst/>
-          </a:prstGeom>
-          <a:noFill/>
-        </p:spPr>
-        <p:txBody>
-          <a:bodyPr wrap="square" anchor="ctr" lIns="73152" rIns="73152" tIns="27432" bIns="27432">
-            <a:spAutoFit/>
-          </a:bodyPr>
-          <a:lstStyle/>
-          <a:p>
-            <a:pPr algn="ctr"/>
-            <a:r>
-              <a:rPr sz="1600" b="1">
-                <a:solidFill>
-                  <a:srgbClr val="1F3A5C"/>
-                </a:solidFill>
-                <a:latin typeface="Noto Sans CJK JP"/>
-                <a:ea typeface="Noto Sans CJK JP"/>
-              </a:rPr>
-              <a:t>1つのランタイムで数百〜数千個</a:t>
-            </a:r>
-          </a:p>
-        </p:txBody>
-      </p:sp>
-      <p:sp>
-        <p:nvSpPr>
-          <p:cNvPr id="19" name="Rounded Rectangle 18"/>
-          <p:cNvSpPr/>
-          <p:nvPr/>
-        </p:nvSpPr>
-        <p:spPr>
-          <a:xfrm>
-            <a:off x="9098280" y="1783080"/>
-            <a:ext cx="2011680" cy="3703320"/>
-          </a:xfrm>
-          <a:prstGeom prst="roundRect">
-            <a:avLst>
-              <a:gd name="adj" fmla="val 10000"/>
-            </a:avLst>
-          </a:prstGeom>
-          <a:solidFill>
-            <a:srgbClr val="2E5E8E"/>
-          </a:solidFill>
-          <a:ln>
-            <a:noFill/>
-          </a:ln>
-          <a:effectLst/>
-        </p:spPr>
-        <p:style>
-          <a:lnRef idx="1">
-            <a:schemeClr val="accent1"/>
-          </a:lnRef>
-          <a:fillRef idx="3">
-            <a:schemeClr val="accent1"/>
-          </a:fillRef>
-          <a:effectRef idx="2">
-            <a:schemeClr val="accent1"/>
-          </a:effectRef>
-          <a:fontRef idx="minor">
-            <a:schemeClr val="lt1"/>
-          </a:fontRef>
-        </p:style>
-        <p:txBody>
-          <a:bodyPr rtlCol="0" anchor="ctr" wrap="square" lIns="73152" rIns="73152" tIns="27432" bIns="27432"/>
-          <a:lstStyle/>
-          <a:p>
-            <a:pPr algn="ctr"/>
-            <a:r>
-              <a:rPr sz="1800" b="1">
-                <a:solidFill>
-                  <a:srgbClr val="FFFFFF"/>
-                </a:solidFill>
-                <a:latin typeface="Noto Sans CJK JP"/>
-                <a:ea typeface="Noto Sans CJK JP"/>
-              </a:rPr>
-              <a:t>V8エンジン</a:t>
-            </a:r>
-          </a:p>
-          <a:p>
-            <a:pPr algn="ctr"/>
-            <a:r>
-              <a:rPr sz="1600" b="0">
-                <a:solidFill>
-                  <a:srgbClr val="FFFFFF"/>
-                </a:solidFill>
-                <a:latin typeface="Noto Sans CJK JP"/>
-                <a:ea typeface="Noto Sans CJK JP"/>
-              </a:rPr>
-              <a:t>Chromeと同じ</a:t>
-            </a:r>
-          </a:p>
-          <a:p>
-            <a:pPr algn="ctr"/>
-            <a:r>
-              <a:rPr sz="1600" b="0">
-                <a:solidFill>
-                  <a:srgbClr val="FFFFFF"/>
-                </a:solidFill>
-                <a:latin typeface="Noto Sans CJK JP"/>
-                <a:ea typeface="Noto Sans CJK JP"/>
-              </a:rPr>
-              <a:t>みんなで共有</a:t>
-            </a:r>
-          </a:p>
-        </p:txBody>
-      </p:sp>
       <p:cxnSp>
         <p:nvCxnSpPr>
           <p:cNvPr id="20" name="Connector 19"/>
@@ -4947,16 +5071,17 @@
         </p:nvCxnSpPr>
         <p:spPr>
           <a:xfrm>
-            <a:off x="8595360" y="2217420"/>
-            <a:ext cx="502920" cy="0"/>
+            <a:off x="7132320" y="1920240"/>
+            <a:ext cx="320040" cy="0"/>
           </a:xfrm>
           <a:prstGeom prst="line">
             <a:avLst/>
           </a:prstGeom>
-          <a:ln>
+          <a:ln w="19050">
             <a:solidFill>
               <a:srgbClr val="6B7280"/>
             </a:solidFill>
+            <a:tailEnd type="triangle" w="med" len="med"/>
           </a:ln>
         </p:spPr>
         <p:style>
@@ -4982,16 +5107,17 @@
         </p:nvCxnSpPr>
         <p:spPr>
           <a:xfrm>
-            <a:off x="8595360" y="3634740"/>
-            <a:ext cx="502920" cy="0"/>
+            <a:off x="9464040" y="1920240"/>
+            <a:ext cx="320040" cy="0"/>
           </a:xfrm>
           <a:prstGeom prst="line">
             <a:avLst/>
           </a:prstGeom>
-          <a:ln>
+          <a:ln w="19050">
             <a:solidFill>
               <a:srgbClr val="6B7280"/>
             </a:solidFill>
+            <a:tailEnd type="triangle" w="med" len="med"/>
           </a:ln>
         </p:spPr>
         <p:style>
@@ -5017,16 +5143,161 @@
         </p:nvCxnSpPr>
         <p:spPr>
           <a:xfrm>
-            <a:off x="8595360" y="5052059"/>
-            <a:ext cx="502920" cy="0"/>
+            <a:off x="4800600" y="5074920"/>
+            <a:ext cx="320040" cy="0"/>
           </a:xfrm>
           <a:prstGeom prst="line">
             <a:avLst/>
           </a:prstGeom>
-          <a:ln>
+          <a:ln w="19050">
             <a:solidFill>
               <a:srgbClr val="6B7280"/>
             </a:solidFill>
+            <a:tailEnd type="triangle" w="med" len="med"/>
+          </a:ln>
+        </p:spPr>
+        <p:style>
+          <a:lnRef idx="2">
+            <a:schemeClr val="accent1"/>
+          </a:lnRef>
+          <a:fillRef idx="0">
+            <a:schemeClr val="accent1"/>
+          </a:fillRef>
+          <a:effectRef idx="1">
+            <a:schemeClr val="accent1"/>
+          </a:effectRef>
+          <a:fontRef idx="minor">
+            <a:schemeClr val="tx1"/>
+          </a:fontRef>
+        </p:style>
+      </p:cxnSp>
+      <p:cxnSp>
+        <p:nvCxnSpPr>
+          <p:cNvPr id="23" name="Connector 22"/>
+          <p:cNvCxnSpPr/>
+          <p:nvPr/>
+        </p:nvCxnSpPr>
+        <p:spPr>
+          <a:xfrm>
+            <a:off x="7132320" y="5074920"/>
+            <a:ext cx="320040" cy="0"/>
+          </a:xfrm>
+          <a:prstGeom prst="line">
+            <a:avLst/>
+          </a:prstGeom>
+          <a:ln w="19050">
+            <a:solidFill>
+              <a:srgbClr val="6B7280"/>
+            </a:solidFill>
+            <a:tailEnd type="triangle" w="med" len="med"/>
+          </a:ln>
+        </p:spPr>
+        <p:style>
+          <a:lnRef idx="2">
+            <a:schemeClr val="accent1"/>
+          </a:lnRef>
+          <a:fillRef idx="0">
+            <a:schemeClr val="accent1"/>
+          </a:fillRef>
+          <a:effectRef idx="1">
+            <a:schemeClr val="accent1"/>
+          </a:effectRef>
+          <a:fontRef idx="minor">
+            <a:schemeClr val="tx1"/>
+          </a:fontRef>
+        </p:style>
+      </p:cxnSp>
+      <p:cxnSp>
+        <p:nvCxnSpPr>
+          <p:cNvPr id="24" name="Connector 23"/>
+          <p:cNvCxnSpPr/>
+          <p:nvPr/>
+        </p:nvCxnSpPr>
+        <p:spPr>
+          <a:xfrm>
+            <a:off x="9464040" y="5074920"/>
+            <a:ext cx="320040" cy="0"/>
+          </a:xfrm>
+          <a:prstGeom prst="line">
+            <a:avLst/>
+          </a:prstGeom>
+          <a:ln w="19050">
+            <a:solidFill>
+              <a:srgbClr val="6B7280"/>
+            </a:solidFill>
+            <a:tailEnd type="triangle" w="med" len="med"/>
+          </a:ln>
+        </p:spPr>
+        <p:style>
+          <a:lnRef idx="2">
+            <a:schemeClr val="accent1"/>
+          </a:lnRef>
+          <a:fillRef idx="0">
+            <a:schemeClr val="accent1"/>
+          </a:fillRef>
+          <a:effectRef idx="1">
+            <a:schemeClr val="accent1"/>
+          </a:effectRef>
+          <a:fontRef idx="minor">
+            <a:schemeClr val="tx1"/>
+          </a:fontRef>
+        </p:style>
+      </p:cxnSp>
+      <p:cxnSp>
+        <p:nvCxnSpPr>
+          <p:cNvPr id="25" name="Connector 24"/>
+          <p:cNvCxnSpPr/>
+          <p:nvPr/>
+        </p:nvCxnSpPr>
+        <p:spPr>
+          <a:xfrm flipV="1">
+            <a:off x="2103120" y="1920240"/>
+            <a:ext cx="685800" cy="1325880"/>
+          </a:xfrm>
+          <a:prstGeom prst="line">
+            <a:avLst/>
+          </a:prstGeom>
+          <a:ln w="19050">
+            <a:solidFill>
+              <a:srgbClr val="6B7280"/>
+            </a:solidFill>
+            <a:tailEnd type="triangle" w="med" len="med"/>
+          </a:ln>
+        </p:spPr>
+        <p:style>
+          <a:lnRef idx="2">
+            <a:schemeClr val="accent1"/>
+          </a:lnRef>
+          <a:fillRef idx="0">
+            <a:schemeClr val="accent1"/>
+          </a:fillRef>
+          <a:effectRef idx="1">
+            <a:schemeClr val="accent1"/>
+          </a:effectRef>
+          <a:fontRef idx="minor">
+            <a:schemeClr val="tx1"/>
+          </a:fontRef>
+        </p:style>
+      </p:cxnSp>
+      <p:cxnSp>
+        <p:nvCxnSpPr>
+          <p:cNvPr id="26" name="Connector 25"/>
+          <p:cNvCxnSpPr/>
+          <p:nvPr/>
+        </p:nvCxnSpPr>
+        <p:spPr>
+          <a:xfrm>
+            <a:off x="2103120" y="3794760"/>
+            <a:ext cx="685800" cy="1280160"/>
+          </a:xfrm>
+          <a:prstGeom prst="line">
+            <a:avLst/>
+          </a:prstGeom>
+          <a:ln w="19050">
+            <a:solidFill>
+              <a:srgbClr val="6B7280"/>
+            </a:solidFill>
+            <a:tailEnd type="triangle" w="med" len="med"/>
           </a:ln>
         </p:spPr>
         <p:style>
@@ -5070,8 +5341,8 @@
         </p:nvSpPr>
         <p:spPr>
           <a:xfrm>
-            <a:off x="457200" y="731520"/>
-            <a:ext cx="5394960" cy="3977639"/>
+            <a:off x="365760" y="594360"/>
+            <a:ext cx="5486400" cy="5120640"/>
           </a:xfrm>
           <a:prstGeom prst="roundRect">
             <a:avLst>
@@ -5118,7 +5389,7 @@
         </p:nvSpPr>
         <p:spPr>
           <a:xfrm>
-            <a:off x="731520" y="493776"/>
+            <a:off x="640080" y="356616"/>
             <a:ext cx="1645919" cy="475488"/>
           </a:xfrm>
           <a:prstGeom prst="roundRect">
@@ -5174,120 +5445,8 @@
         </p:nvSpPr>
         <p:spPr>
           <a:xfrm>
-            <a:off x="731520" y="4023360"/>
-            <a:ext cx="4846320" cy="502920"/>
-          </a:xfrm>
-          <a:prstGeom prst="roundRect">
-            <a:avLst>
-              <a:gd name="adj" fmla="val 20000"/>
-            </a:avLst>
-          </a:prstGeom>
-          <a:solidFill>
-            <a:srgbClr val="E5E7EB"/>
-          </a:solidFill>
-          <a:ln>
-            <a:noFill/>
-          </a:ln>
-          <a:effectLst/>
-        </p:spPr>
-        <p:style>
-          <a:lnRef idx="1">
-            <a:schemeClr val="accent1"/>
-          </a:lnRef>
-          <a:fillRef idx="3">
-            <a:schemeClr val="accent1"/>
-          </a:fillRef>
-          <a:effectRef idx="2">
-            <a:schemeClr val="accent1"/>
-          </a:effectRef>
-          <a:fontRef idx="minor">
-            <a:schemeClr val="lt1"/>
-          </a:fontRef>
-        </p:style>
-        <p:txBody>
-          <a:bodyPr rtlCol="0" anchor="ctr" wrap="square" lIns="73152" rIns="73152" tIns="27432" bIns="27432"/>
-          <a:lstStyle/>
-          <a:p>
-            <a:pPr algn="ctr"/>
-            <a:r>
-              <a:rPr sz="1600" b="1">
-                <a:solidFill>
-                  <a:srgbClr val="1F3A5C"/>
-                </a:solidFill>
-                <a:latin typeface="Noto Sans CJK JP"/>
-                <a:ea typeface="Noto Sans CJK JP"/>
-              </a:rPr>
-              <a:t>サーバー</a:t>
-            </a:r>
-          </a:p>
-        </p:txBody>
-      </p:sp>
-      <p:sp>
-        <p:nvSpPr>
-          <p:cNvPr id="5" name="Rounded Rectangle 4"/>
-          <p:cNvSpPr/>
-          <p:nvPr/>
-        </p:nvSpPr>
-        <p:spPr>
-          <a:xfrm>
-            <a:off x="731520" y="3429000"/>
-            <a:ext cx="4846320" cy="502920"/>
-          </a:xfrm>
-          <a:prstGeom prst="roundRect">
-            <a:avLst>
-              <a:gd name="adj" fmla="val 20000"/>
-            </a:avLst>
-          </a:prstGeom>
-          <a:solidFill>
-            <a:srgbClr val="E5E7EB"/>
-          </a:solidFill>
-          <a:ln>
-            <a:noFill/>
-          </a:ln>
-          <a:effectLst/>
-        </p:spPr>
-        <p:style>
-          <a:lnRef idx="1">
-            <a:schemeClr val="accent1"/>
-          </a:lnRef>
-          <a:fillRef idx="3">
-            <a:schemeClr val="accent1"/>
-          </a:fillRef>
-          <a:effectRef idx="2">
-            <a:schemeClr val="accent1"/>
-          </a:effectRef>
-          <a:fontRef idx="minor">
-            <a:schemeClr val="lt1"/>
-          </a:fontRef>
-        </p:style>
-        <p:txBody>
-          <a:bodyPr rtlCol="0" anchor="ctr" wrap="square" lIns="73152" rIns="73152" tIns="27432" bIns="27432"/>
-          <a:lstStyle/>
-          <a:p>
-            <a:pPr algn="ctr"/>
-            <a:r>
-              <a:rPr sz="1600" b="1">
-                <a:solidFill>
-                  <a:srgbClr val="1F3A5C"/>
-                </a:solidFill>
-                <a:latin typeface="Noto Sans CJK JP"/>
-                <a:ea typeface="Noto Sans CJK JP"/>
-              </a:rPr>
-              <a:t>OS</a:t>
-            </a:r>
-          </a:p>
-        </p:txBody>
-      </p:sp>
-      <p:sp>
-        <p:nvSpPr>
-          <p:cNvPr id="6" name="Rounded Rectangle 5"/>
-          <p:cNvSpPr/>
-          <p:nvPr/>
-        </p:nvSpPr>
-        <p:spPr>
-          <a:xfrm>
-            <a:off x="685800" y="1188720"/>
-            <a:ext cx="1600200" cy="2148840"/>
+            <a:off x="640080" y="1143000"/>
+            <a:ext cx="1554480" cy="2468879"/>
           </a:xfrm>
           <a:prstGeom prst="roundRect">
             <a:avLst>
@@ -5326,14 +5485,14 @@
       </p:sp>
       <p:sp>
         <p:nvSpPr>
-          <p:cNvPr id="7" name="TextBox 6"/>
+          <p:cNvPr id="5" name="TextBox 4"/>
           <p:cNvSpPr txBox="1"/>
           <p:nvPr/>
         </p:nvSpPr>
         <p:spPr>
           <a:xfrm>
-            <a:off x="685800" y="1207008"/>
-            <a:ext cx="1600200" cy="411480"/>
+            <a:off x="640080" y="1170432"/>
+            <a:ext cx="1554480" cy="384048"/>
           </a:xfrm>
           <a:prstGeom prst="rect">
             <a:avLst/>
@@ -5362,18 +5521,18 @@
       </p:sp>
       <p:sp>
         <p:nvSpPr>
-          <p:cNvPr id="8" name="Rounded Rectangle 7"/>
+          <p:cNvPr id="6" name="Rounded Rectangle 5"/>
           <p:cNvSpPr/>
           <p:nvPr/>
         </p:nvSpPr>
         <p:spPr>
           <a:xfrm>
-            <a:off x="822960" y="1691640"/>
-            <a:ext cx="1325880" cy="685800"/>
+            <a:off x="731519" y="1600200"/>
+            <a:ext cx="1371600" cy="548640"/>
           </a:xfrm>
           <a:prstGeom prst="roundRect">
             <a:avLst>
-              <a:gd name="adj" fmla="val 16000"/>
+              <a:gd name="adj" fmla="val 20000"/>
             </a:avLst>
           </a:prstGeom>
           <a:solidFill>
@@ -5406,32 +5565,32 @@
           <a:p>
             <a:pPr algn="ctr"/>
             <a:r>
-              <a:rPr sz="1600" b="1">
+              <a:rPr sz="1500" b="1">
                 <a:solidFill>
                   <a:srgbClr val="1F3A5C"/>
                 </a:solidFill>
                 <a:latin typeface="Noto Sans CJK JP"/>
                 <a:ea typeface="Noto Sans CJK JP"/>
               </a:rPr>
-              <a:t>コード1</a:t>
-            </a:r>
-          </a:p>
-        </p:txBody>
-      </p:sp>
-      <p:sp>
-        <p:nvSpPr>
-          <p:cNvPr id="9" name="Rounded Rectangle 8"/>
+              <a:t>コード</a:t>
+            </a:r>
+          </a:p>
+        </p:txBody>
+      </p:sp>
+      <p:sp>
+        <p:nvSpPr>
+          <p:cNvPr id="7" name="Rounded Rectangle 6"/>
           <p:cNvSpPr/>
           <p:nvPr/>
         </p:nvSpPr>
         <p:spPr>
           <a:xfrm>
-            <a:off x="822960" y="2514600"/>
-            <a:ext cx="1325880" cy="685800"/>
+            <a:off x="731519" y="2240280"/>
+            <a:ext cx="1371600" cy="548640"/>
           </a:xfrm>
           <a:prstGeom prst="roundRect">
             <a:avLst>
-              <a:gd name="adj" fmla="val 16000"/>
+              <a:gd name="adj" fmla="val 20000"/>
             </a:avLst>
           </a:prstGeom>
           <a:solidFill>
@@ -5476,14 +5635,70 @@
       </p:sp>
       <p:sp>
         <p:nvSpPr>
-          <p:cNvPr id="10" name="Rounded Rectangle 9"/>
+          <p:cNvPr id="8" name="Rounded Rectangle 7"/>
           <p:cNvSpPr/>
           <p:nvPr/>
         </p:nvSpPr>
         <p:spPr>
           <a:xfrm>
-            <a:off x="2377440" y="1188720"/>
-            <a:ext cx="1600200" cy="2148840"/>
+            <a:off x="731519" y="2880360"/>
+            <a:ext cx="1371600" cy="548640"/>
+          </a:xfrm>
+          <a:prstGeom prst="roundRect">
+            <a:avLst>
+              <a:gd name="adj" fmla="val 20000"/>
+            </a:avLst>
+          </a:prstGeom>
+          <a:solidFill>
+            <a:srgbClr val="E5E7EB"/>
+          </a:solidFill>
+          <a:ln>
+            <a:noFill/>
+          </a:ln>
+          <a:effectLst/>
+        </p:spPr>
+        <p:style>
+          <a:lnRef idx="1">
+            <a:schemeClr val="accent1"/>
+          </a:lnRef>
+          <a:fillRef idx="3">
+            <a:schemeClr val="accent1"/>
+          </a:fillRef>
+          <a:effectRef idx="2">
+            <a:schemeClr val="accent1"/>
+          </a:effectRef>
+          <a:fontRef idx="minor">
+            <a:schemeClr val="lt1"/>
+          </a:fontRef>
+        </p:style>
+        <p:txBody>
+          <a:bodyPr rtlCol="0" anchor="ctr" wrap="square" lIns="73152" rIns="73152" tIns="27432" bIns="27432"/>
+          <a:lstStyle/>
+          <a:p>
+            <a:pPr algn="ctr"/>
+            <a:r>
+              <a:rPr sz="1500" b="1">
+                <a:solidFill>
+                  <a:srgbClr val="1F3A5C"/>
+                </a:solidFill>
+                <a:latin typeface="Noto Sans CJK JP"/>
+                <a:ea typeface="Noto Sans CJK JP"/>
+              </a:rPr>
+              <a:t>ライブラリ等</a:t>
+            </a:r>
+          </a:p>
+        </p:txBody>
+      </p:sp>
+      <p:sp>
+        <p:nvSpPr>
+          <p:cNvPr id="9" name="Rounded Rectangle 8"/>
+          <p:cNvSpPr/>
+          <p:nvPr/>
+        </p:nvSpPr>
+        <p:spPr>
+          <a:xfrm>
+            <a:off x="2331720" y="1143000"/>
+            <a:ext cx="1554480" cy="2468879"/>
           </a:xfrm>
           <a:prstGeom prst="roundRect">
             <a:avLst>
@@ -5522,14 +5737,14 @@
       </p:sp>
       <p:sp>
         <p:nvSpPr>
-          <p:cNvPr id="11" name="TextBox 10"/>
+          <p:cNvPr id="10" name="TextBox 9"/>
           <p:cNvSpPr txBox="1"/>
           <p:nvPr/>
         </p:nvSpPr>
         <p:spPr>
           <a:xfrm>
-            <a:off x="2377440" y="1207008"/>
-            <a:ext cx="1600200" cy="411480"/>
+            <a:off x="2331720" y="1170432"/>
+            <a:ext cx="1554480" cy="384048"/>
           </a:xfrm>
           <a:prstGeom prst="rect">
             <a:avLst/>
@@ -5558,18 +5773,18 @@
       </p:sp>
       <p:sp>
         <p:nvSpPr>
-          <p:cNvPr id="12" name="Rounded Rectangle 11"/>
+          <p:cNvPr id="11" name="Rounded Rectangle 10"/>
           <p:cNvSpPr/>
           <p:nvPr/>
         </p:nvSpPr>
         <p:spPr>
           <a:xfrm>
-            <a:off x="2514600" y="1691640"/>
-            <a:ext cx="1325880" cy="685800"/>
+            <a:off x="2423160" y="1600200"/>
+            <a:ext cx="1371600" cy="548640"/>
           </a:xfrm>
           <a:prstGeom prst="roundRect">
             <a:avLst>
-              <a:gd name="adj" fmla="val 16000"/>
+              <a:gd name="adj" fmla="val 20000"/>
             </a:avLst>
           </a:prstGeom>
           <a:solidFill>
@@ -5602,32 +5817,32 @@
           <a:p>
             <a:pPr algn="ctr"/>
             <a:r>
-              <a:rPr sz="1600" b="1">
+              <a:rPr sz="1500" b="1">
                 <a:solidFill>
                   <a:srgbClr val="1F3A5C"/>
                 </a:solidFill>
                 <a:latin typeface="Noto Sans CJK JP"/>
                 <a:ea typeface="Noto Sans CJK JP"/>
               </a:rPr>
-              <a:t>コード2</a:t>
-            </a:r>
-          </a:p>
-        </p:txBody>
-      </p:sp>
-      <p:sp>
-        <p:nvSpPr>
-          <p:cNvPr id="13" name="Rounded Rectangle 12"/>
+              <a:t>コード</a:t>
+            </a:r>
+          </a:p>
+        </p:txBody>
+      </p:sp>
+      <p:sp>
+        <p:nvSpPr>
+          <p:cNvPr id="12" name="Rounded Rectangle 11"/>
           <p:cNvSpPr/>
           <p:nvPr/>
         </p:nvSpPr>
         <p:spPr>
           <a:xfrm>
-            <a:off x="2514600" y="2514600"/>
-            <a:ext cx="1325880" cy="685800"/>
+            <a:off x="2423160" y="2240280"/>
+            <a:ext cx="1371600" cy="548640"/>
           </a:xfrm>
           <a:prstGeom prst="roundRect">
             <a:avLst>
-              <a:gd name="adj" fmla="val 16000"/>
+              <a:gd name="adj" fmla="val 20000"/>
             </a:avLst>
           </a:prstGeom>
           <a:solidFill>
@@ -5672,14 +5887,70 @@
       </p:sp>
       <p:sp>
         <p:nvSpPr>
+          <p:cNvPr id="13" name="Rounded Rectangle 12"/>
+          <p:cNvSpPr/>
+          <p:nvPr/>
+        </p:nvSpPr>
+        <p:spPr>
+          <a:xfrm>
+            <a:off x="2423160" y="2880360"/>
+            <a:ext cx="1371600" cy="548640"/>
+          </a:xfrm>
+          <a:prstGeom prst="roundRect">
+            <a:avLst>
+              <a:gd name="adj" fmla="val 20000"/>
+            </a:avLst>
+          </a:prstGeom>
+          <a:solidFill>
+            <a:srgbClr val="E5E7EB"/>
+          </a:solidFill>
+          <a:ln>
+            <a:noFill/>
+          </a:ln>
+          <a:effectLst/>
+        </p:spPr>
+        <p:style>
+          <a:lnRef idx="1">
+            <a:schemeClr val="accent1"/>
+          </a:lnRef>
+          <a:fillRef idx="3">
+            <a:schemeClr val="accent1"/>
+          </a:fillRef>
+          <a:effectRef idx="2">
+            <a:schemeClr val="accent1"/>
+          </a:effectRef>
+          <a:fontRef idx="minor">
+            <a:schemeClr val="lt1"/>
+          </a:fontRef>
+        </p:style>
+        <p:txBody>
+          <a:bodyPr rtlCol="0" anchor="ctr" wrap="square" lIns="73152" rIns="73152" tIns="27432" bIns="27432"/>
+          <a:lstStyle/>
+          <a:p>
+            <a:pPr algn="ctr"/>
+            <a:r>
+              <a:rPr sz="1500" b="1">
+                <a:solidFill>
+                  <a:srgbClr val="1F3A5C"/>
+                </a:solidFill>
+                <a:latin typeface="Noto Sans CJK JP"/>
+                <a:ea typeface="Noto Sans CJK JP"/>
+              </a:rPr>
+              <a:t>ライブラリ等</a:t>
+            </a:r>
+          </a:p>
+        </p:txBody>
+      </p:sp>
+      <p:sp>
+        <p:nvSpPr>
           <p:cNvPr id="14" name="Rounded Rectangle 13"/>
           <p:cNvSpPr/>
           <p:nvPr/>
         </p:nvSpPr>
         <p:spPr>
           <a:xfrm>
-            <a:off x="4069080" y="1188720"/>
-            <a:ext cx="1600200" cy="2148840"/>
+            <a:off x="4023359" y="1143000"/>
+            <a:ext cx="1554480" cy="2468879"/>
           </a:xfrm>
           <a:prstGeom prst="roundRect">
             <a:avLst>
@@ -5724,8 +5995,8 @@
         </p:nvSpPr>
         <p:spPr>
           <a:xfrm>
-            <a:off x="4069080" y="1207008"/>
-            <a:ext cx="1600200" cy="411480"/>
+            <a:off x="4023359" y="1170432"/>
+            <a:ext cx="1554480" cy="384048"/>
           </a:xfrm>
           <a:prstGeom prst="rect">
             <a:avLst/>
@@ -5760,12 +6031,12 @@
         </p:nvSpPr>
         <p:spPr>
           <a:xfrm>
-            <a:off x="4206240" y="1691640"/>
-            <a:ext cx="1325880" cy="685800"/>
+            <a:off x="4114799" y="1600200"/>
+            <a:ext cx="1371600" cy="548640"/>
           </a:xfrm>
           <a:prstGeom prst="roundRect">
             <a:avLst>
-              <a:gd name="adj" fmla="val 16000"/>
+              <a:gd name="adj" fmla="val 20000"/>
             </a:avLst>
           </a:prstGeom>
           <a:solidFill>
@@ -5798,14 +6069,14 @@
           <a:p>
             <a:pPr algn="ctr"/>
             <a:r>
-              <a:rPr sz="1600" b="1">
+              <a:rPr sz="1500" b="1">
                 <a:solidFill>
                   <a:srgbClr val="1F3A5C"/>
                 </a:solidFill>
                 <a:latin typeface="Noto Sans CJK JP"/>
                 <a:ea typeface="Noto Sans CJK JP"/>
               </a:rPr>
-              <a:t>コード3</a:t>
+              <a:t>コード</a:t>
             </a:r>
           </a:p>
         </p:txBody>
@@ -5818,12 +6089,12 @@
         </p:nvSpPr>
         <p:spPr>
           <a:xfrm>
-            <a:off x="4206240" y="2514600"/>
-            <a:ext cx="1325880" cy="685800"/>
+            <a:off x="4114799" y="2240280"/>
+            <a:ext cx="1371600" cy="548640"/>
           </a:xfrm>
           <a:prstGeom prst="roundRect">
             <a:avLst>
-              <a:gd name="adj" fmla="val 16000"/>
+              <a:gd name="adj" fmla="val 20000"/>
             </a:avLst>
           </a:prstGeom>
           <a:solidFill>
@@ -5874,8 +6145,232 @@
         </p:nvSpPr>
         <p:spPr>
           <a:xfrm>
-            <a:off x="6355080" y="731520"/>
-            <a:ext cx="5394960" cy="3977639"/>
+            <a:off x="4114799" y="2880360"/>
+            <a:ext cx="1371600" cy="548640"/>
+          </a:xfrm>
+          <a:prstGeom prst="roundRect">
+            <a:avLst>
+              <a:gd name="adj" fmla="val 20000"/>
+            </a:avLst>
+          </a:prstGeom>
+          <a:solidFill>
+            <a:srgbClr val="E5E7EB"/>
+          </a:solidFill>
+          <a:ln>
+            <a:noFill/>
+          </a:ln>
+          <a:effectLst/>
+        </p:spPr>
+        <p:style>
+          <a:lnRef idx="1">
+            <a:schemeClr val="accent1"/>
+          </a:lnRef>
+          <a:fillRef idx="3">
+            <a:schemeClr val="accent1"/>
+          </a:fillRef>
+          <a:effectRef idx="2">
+            <a:schemeClr val="accent1"/>
+          </a:effectRef>
+          <a:fontRef idx="minor">
+            <a:schemeClr val="lt1"/>
+          </a:fontRef>
+        </p:style>
+        <p:txBody>
+          <a:bodyPr rtlCol="0" anchor="ctr" wrap="square" lIns="73152" rIns="73152" tIns="27432" bIns="27432"/>
+          <a:lstStyle/>
+          <a:p>
+            <a:pPr algn="ctr"/>
+            <a:r>
+              <a:rPr sz="1500" b="1">
+                <a:solidFill>
+                  <a:srgbClr val="1F3A5C"/>
+                </a:solidFill>
+                <a:latin typeface="Noto Sans CJK JP"/>
+                <a:ea typeface="Noto Sans CJK JP"/>
+              </a:rPr>
+              <a:t>ライブラリ等</a:t>
+            </a:r>
+          </a:p>
+        </p:txBody>
+      </p:sp>
+      <p:sp>
+        <p:nvSpPr>
+          <p:cNvPr id="19" name="Rounded Rectangle 18"/>
+          <p:cNvSpPr/>
+          <p:nvPr/>
+        </p:nvSpPr>
+        <p:spPr>
+          <a:xfrm>
+            <a:off x="640080" y="3794760"/>
+            <a:ext cx="4937760" cy="502920"/>
+          </a:xfrm>
+          <a:prstGeom prst="roundRect">
+            <a:avLst>
+              <a:gd name="adj" fmla="val 20000"/>
+            </a:avLst>
+          </a:prstGeom>
+          <a:solidFill>
+            <a:srgbClr val="E5E7EB"/>
+          </a:solidFill>
+          <a:ln>
+            <a:noFill/>
+          </a:ln>
+          <a:effectLst/>
+        </p:spPr>
+        <p:style>
+          <a:lnRef idx="1">
+            <a:schemeClr val="accent1"/>
+          </a:lnRef>
+          <a:fillRef idx="3">
+            <a:schemeClr val="accent1"/>
+          </a:fillRef>
+          <a:effectRef idx="2">
+            <a:schemeClr val="accent1"/>
+          </a:effectRef>
+          <a:fontRef idx="minor">
+            <a:schemeClr val="lt1"/>
+          </a:fontRef>
+        </p:style>
+        <p:txBody>
+          <a:bodyPr rtlCol="0" anchor="ctr" wrap="square" lIns="73152" rIns="73152" tIns="27432" bIns="27432"/>
+          <a:lstStyle/>
+          <a:p>
+            <a:pPr algn="ctr"/>
+            <a:r>
+              <a:rPr sz="1600" b="1">
+                <a:solidFill>
+                  <a:srgbClr val="1F3A5C"/>
+                </a:solidFill>
+                <a:latin typeface="Noto Sans CJK JP"/>
+                <a:ea typeface="Noto Sans CJK JP"/>
+              </a:rPr>
+              <a:t>コンテナランタイム（containerd など）</a:t>
+            </a:r>
+          </a:p>
+        </p:txBody>
+      </p:sp>
+      <p:sp>
+        <p:nvSpPr>
+          <p:cNvPr id="20" name="Rounded Rectangle 19"/>
+          <p:cNvSpPr/>
+          <p:nvPr/>
+        </p:nvSpPr>
+        <p:spPr>
+          <a:xfrm>
+            <a:off x="640080" y="4389120"/>
+            <a:ext cx="4937760" cy="502920"/>
+          </a:xfrm>
+          <a:prstGeom prst="roundRect">
+            <a:avLst>
+              <a:gd name="adj" fmla="val 20000"/>
+            </a:avLst>
+          </a:prstGeom>
+          <a:solidFill>
+            <a:srgbClr val="E5E7EB"/>
+          </a:solidFill>
+          <a:ln>
+            <a:noFill/>
+          </a:ln>
+          <a:effectLst/>
+        </p:spPr>
+        <p:style>
+          <a:lnRef idx="1">
+            <a:schemeClr val="accent1"/>
+          </a:lnRef>
+          <a:fillRef idx="3">
+            <a:schemeClr val="accent1"/>
+          </a:fillRef>
+          <a:effectRef idx="2">
+            <a:schemeClr val="accent1"/>
+          </a:effectRef>
+          <a:fontRef idx="minor">
+            <a:schemeClr val="lt1"/>
+          </a:fontRef>
+        </p:style>
+        <p:txBody>
+          <a:bodyPr rtlCol="0" anchor="ctr" wrap="square" lIns="73152" rIns="73152" tIns="27432" bIns="27432"/>
+          <a:lstStyle/>
+          <a:p>
+            <a:pPr algn="ctr"/>
+            <a:r>
+              <a:rPr sz="1600" b="1">
+                <a:solidFill>
+                  <a:srgbClr val="1F3A5C"/>
+                </a:solidFill>
+                <a:latin typeface="Noto Sans CJK JP"/>
+                <a:ea typeface="Noto Sans CJK JP"/>
+              </a:rPr>
+              <a:t>ホストOS（Linuxカーネル）</a:t>
+            </a:r>
+          </a:p>
+        </p:txBody>
+      </p:sp>
+      <p:sp>
+        <p:nvSpPr>
+          <p:cNvPr id="21" name="Rounded Rectangle 20"/>
+          <p:cNvSpPr/>
+          <p:nvPr/>
+        </p:nvSpPr>
+        <p:spPr>
+          <a:xfrm>
+            <a:off x="640080" y="4983480"/>
+            <a:ext cx="4937760" cy="502920"/>
+          </a:xfrm>
+          <a:prstGeom prst="roundRect">
+            <a:avLst>
+              <a:gd name="adj" fmla="val 20000"/>
+            </a:avLst>
+          </a:prstGeom>
+          <a:solidFill>
+            <a:srgbClr val="E5E7EB"/>
+          </a:solidFill>
+          <a:ln>
+            <a:noFill/>
+          </a:ln>
+          <a:effectLst/>
+        </p:spPr>
+        <p:style>
+          <a:lnRef idx="1">
+            <a:schemeClr val="accent1"/>
+          </a:lnRef>
+          <a:fillRef idx="3">
+            <a:schemeClr val="accent1"/>
+          </a:fillRef>
+          <a:effectRef idx="2">
+            <a:schemeClr val="accent1"/>
+          </a:effectRef>
+          <a:fontRef idx="minor">
+            <a:schemeClr val="lt1"/>
+          </a:fontRef>
+        </p:style>
+        <p:txBody>
+          <a:bodyPr rtlCol="0" anchor="ctr" wrap="square" lIns="73152" rIns="73152" tIns="27432" bIns="27432"/>
+          <a:lstStyle/>
+          <a:p>
+            <a:pPr algn="ctr"/>
+            <a:r>
+              <a:rPr sz="1600" b="1">
+                <a:solidFill>
+                  <a:srgbClr val="1F3A5C"/>
+                </a:solidFill>
+                <a:latin typeface="Noto Sans CJK JP"/>
+                <a:ea typeface="Noto Sans CJK JP"/>
+              </a:rPr>
+              <a:t>ハードウェア</a:t>
+            </a:r>
+          </a:p>
+        </p:txBody>
+      </p:sp>
+      <p:sp>
+        <p:nvSpPr>
+          <p:cNvPr id="22" name="Rounded Rectangle 21"/>
+          <p:cNvSpPr/>
+          <p:nvPr/>
+        </p:nvSpPr>
+        <p:spPr>
+          <a:xfrm>
+            <a:off x="6355080" y="594360"/>
+            <a:ext cx="5486400" cy="5120640"/>
           </a:xfrm>
           <a:prstGeom prst="roundRect">
             <a:avLst>
@@ -5916,13 +6411,13 @@
       </p:sp>
       <p:sp>
         <p:nvSpPr>
-          <p:cNvPr id="19" name="Rounded Rectangle 18"/>
+          <p:cNvPr id="23" name="Rounded Rectangle 22"/>
           <p:cNvSpPr/>
           <p:nvPr/>
         </p:nvSpPr>
         <p:spPr>
           <a:xfrm>
-            <a:off x="6629400" y="493776"/>
+            <a:off x="6629400" y="356616"/>
             <a:ext cx="2194560" cy="475488"/>
           </a:xfrm>
           <a:prstGeom prst="roundRect">
@@ -5972,25 +6467,25 @@
       </p:sp>
       <p:sp>
         <p:nvSpPr>
-          <p:cNvPr id="20" name="Rounded Rectangle 19"/>
+          <p:cNvPr id="24" name="Rounded Rectangle 23"/>
           <p:cNvSpPr/>
           <p:nvPr/>
         </p:nvSpPr>
         <p:spPr>
           <a:xfrm>
-            <a:off x="6629400" y="4023360"/>
-            <a:ext cx="4846320" cy="502920"/>
+            <a:off x="6629400" y="1143000"/>
+            <a:ext cx="1554480" cy="1828799"/>
           </a:xfrm>
           <a:prstGeom prst="roundRect">
             <a:avLst>
-              <a:gd name="adj" fmla="val 20000"/>
+              <a:gd name="adj" fmla="val 8000"/>
             </a:avLst>
           </a:prstGeom>
-          <a:solidFill>
-            <a:srgbClr val="E5E7EB"/>
-          </a:solidFill>
-          <a:ln>
-            <a:noFill/>
+          <a:noFill/>
+          <a:ln w="17780">
+            <a:solidFill>
+              <a:srgbClr val="1E8A82"/>
+            </a:solidFill>
           </a:ln>
           <a:effectLst/>
         </p:spPr>
@@ -6009,93 +6504,63 @@
           </a:fontRef>
         </p:style>
         <p:txBody>
-          <a:bodyPr rtlCol="0" anchor="ctr" wrap="square" lIns="73152" rIns="73152" tIns="27432" bIns="27432"/>
+          <a:bodyPr rtlCol="0" anchor="ctr"/>
+          <a:lstStyle/>
+          <a:p>
+            <a:pPr algn="ctr"/>
+          </a:p>
+        </p:txBody>
+      </p:sp>
+      <p:sp>
+        <p:nvSpPr>
+          <p:cNvPr id="25" name="TextBox 24"/>
+          <p:cNvSpPr txBox="1"/>
+          <p:nvPr/>
+        </p:nvSpPr>
+        <p:spPr>
+          <a:xfrm>
+            <a:off x="6629400" y="1170432"/>
+            <a:ext cx="1554480" cy="384048"/>
+          </a:xfrm>
+          <a:prstGeom prst="rect">
+            <a:avLst/>
+          </a:prstGeom>
+          <a:noFill/>
+        </p:spPr>
+        <p:txBody>
+          <a:bodyPr wrap="square" anchor="ctr" lIns="73152" rIns="73152" tIns="27432" bIns="27432">
+            <a:spAutoFit/>
+          </a:bodyPr>
           <a:lstStyle/>
           <a:p>
             <a:pPr algn="ctr"/>
             <a:r>
               <a:rPr sz="1600" b="1">
                 <a:solidFill>
-                  <a:srgbClr val="1F3A5C"/>
+                  <a:srgbClr val="1E8A82"/>
                 </a:solidFill>
                 <a:latin typeface="Noto Sans CJK JP"/>
                 <a:ea typeface="Noto Sans CJK JP"/>
               </a:rPr>
-              <a:t>サーバー</a:t>
-            </a:r>
-          </a:p>
-        </p:txBody>
-      </p:sp>
-      <p:sp>
-        <p:nvSpPr>
-          <p:cNvPr id="21" name="Rounded Rectangle 20"/>
+              <a:t>アイソレート1</a:t>
+            </a:r>
+          </a:p>
+        </p:txBody>
+      </p:sp>
+      <p:sp>
+        <p:nvSpPr>
+          <p:cNvPr id="26" name="Rounded Rectangle 25"/>
           <p:cNvSpPr/>
           <p:nvPr/>
         </p:nvSpPr>
         <p:spPr>
           <a:xfrm>
-            <a:off x="6629400" y="3429000"/>
-            <a:ext cx="4846320" cy="502920"/>
+            <a:off x="6720840" y="1600200"/>
+            <a:ext cx="1371600" cy="548640"/>
           </a:xfrm>
           <a:prstGeom prst="roundRect">
             <a:avLst>
               <a:gd name="adj" fmla="val 20000"/>
-            </a:avLst>
-          </a:prstGeom>
-          <a:solidFill>
-            <a:srgbClr val="E5E7EB"/>
-          </a:solidFill>
-          <a:ln>
-            <a:noFill/>
-          </a:ln>
-          <a:effectLst/>
-        </p:spPr>
-        <p:style>
-          <a:lnRef idx="1">
-            <a:schemeClr val="accent1"/>
-          </a:lnRef>
-          <a:fillRef idx="3">
-            <a:schemeClr val="accent1"/>
-          </a:fillRef>
-          <a:effectRef idx="2">
-            <a:schemeClr val="accent1"/>
-          </a:effectRef>
-          <a:fontRef idx="minor">
-            <a:schemeClr val="lt1"/>
-          </a:fontRef>
-        </p:style>
-        <p:txBody>
-          <a:bodyPr rtlCol="0" anchor="ctr" wrap="square" lIns="73152" rIns="73152" tIns="27432" bIns="27432"/>
-          <a:lstStyle/>
-          <a:p>
-            <a:pPr algn="ctr"/>
-            <a:r>
-              <a:rPr sz="1600" b="1">
-                <a:solidFill>
-                  <a:srgbClr val="1F3A5C"/>
-                </a:solidFill>
-                <a:latin typeface="Noto Sans CJK JP"/>
-                <a:ea typeface="Noto Sans CJK JP"/>
-              </a:rPr>
-              <a:t>OS</a:t>
-            </a:r>
-          </a:p>
-        </p:txBody>
-      </p:sp>
-      <p:sp>
-        <p:nvSpPr>
-          <p:cNvPr id="22" name="Rounded Rectangle 21"/>
-          <p:cNvSpPr/>
-          <p:nvPr/>
-        </p:nvSpPr>
-        <p:spPr>
-          <a:xfrm>
-            <a:off x="6629400" y="1188720"/>
-            <a:ext cx="1508760" cy="1280160"/>
-          </a:xfrm>
-          <a:prstGeom prst="roundRect">
-            <a:avLst>
-              <a:gd name="adj" fmla="val 16000"/>
             </a:avLst>
           </a:prstGeom>
           <a:solidFill>
@@ -6128,45 +6593,170 @@
           <a:p>
             <a:pPr algn="ctr"/>
             <a:r>
-              <a:rPr sz="1600" b="1">
+              <a:rPr sz="1500" b="1">
                 <a:solidFill>
                   <a:srgbClr val="1F3A5C"/>
                 </a:solidFill>
                 <a:latin typeface="Noto Sans CJK JP"/>
                 <a:ea typeface="Noto Sans CJK JP"/>
               </a:rPr>
-              <a:t>コード1</a:t>
-            </a:r>
-          </a:p>
-          <a:p>
-            <a:pPr algn="ctr"/>
-            <a:r>
-              <a:rPr sz="1500" b="0">
-                <a:solidFill>
-                  <a:srgbClr val="6B7280"/>
+              <a:t>コード</a:t>
+            </a:r>
+          </a:p>
+        </p:txBody>
+      </p:sp>
+      <p:sp>
+        <p:nvSpPr>
+          <p:cNvPr id="27" name="Rounded Rectangle 26"/>
+          <p:cNvSpPr/>
+          <p:nvPr/>
+        </p:nvSpPr>
+        <p:spPr>
+          <a:xfrm>
+            <a:off x="6720840" y="2240280"/>
+            <a:ext cx="1371600" cy="548640"/>
+          </a:xfrm>
+          <a:prstGeom prst="roundRect">
+            <a:avLst>
+              <a:gd name="adj" fmla="val 20000"/>
+            </a:avLst>
+          </a:prstGeom>
+          <a:solidFill>
+            <a:srgbClr val="C9E8E4"/>
+          </a:solidFill>
+          <a:ln>
+            <a:noFill/>
+          </a:ln>
+          <a:effectLst/>
+        </p:spPr>
+        <p:style>
+          <a:lnRef idx="1">
+            <a:schemeClr val="accent1"/>
+          </a:lnRef>
+          <a:fillRef idx="3">
+            <a:schemeClr val="accent1"/>
+          </a:fillRef>
+          <a:effectRef idx="2">
+            <a:schemeClr val="accent1"/>
+          </a:effectRef>
+          <a:fontRef idx="minor">
+            <a:schemeClr val="lt1"/>
+          </a:fontRef>
+        </p:style>
+        <p:txBody>
+          <a:bodyPr rtlCol="0" anchor="ctr" wrap="square" lIns="73152" rIns="73152" tIns="27432" bIns="27432"/>
+          <a:lstStyle/>
+          <a:p>
+            <a:pPr algn="ctr"/>
+            <a:r>
+              <a:rPr sz="1500" b="1">
+                <a:solidFill>
+                  <a:srgbClr val="1F3A5C"/>
                 </a:solidFill>
                 <a:latin typeface="Noto Sans CJK JP"/>
                 <a:ea typeface="Noto Sans CJK JP"/>
               </a:rPr>
-              <a:t>アイソレート</a:t>
-            </a:r>
-          </a:p>
-        </p:txBody>
-      </p:sp>
-      <p:sp>
-        <p:nvSpPr>
-          <p:cNvPr id="23" name="Rounded Rectangle 22"/>
+              <a:t>専用のヒープ</a:t>
+            </a:r>
+          </a:p>
+        </p:txBody>
+      </p:sp>
+      <p:sp>
+        <p:nvSpPr>
+          <p:cNvPr id="28" name="Rounded Rectangle 27"/>
           <p:cNvSpPr/>
           <p:nvPr/>
         </p:nvSpPr>
         <p:spPr>
           <a:xfrm>
-            <a:off x="8321040" y="1188720"/>
-            <a:ext cx="1508760" cy="1280160"/>
+            <a:off x="8321040" y="1143000"/>
+            <a:ext cx="1554480" cy="1828799"/>
           </a:xfrm>
           <a:prstGeom prst="roundRect">
             <a:avLst>
-              <a:gd name="adj" fmla="val 16000"/>
+              <a:gd name="adj" fmla="val 8000"/>
+            </a:avLst>
+          </a:prstGeom>
+          <a:noFill/>
+          <a:ln w="17780">
+            <a:solidFill>
+              <a:srgbClr val="1E8A82"/>
+            </a:solidFill>
+          </a:ln>
+          <a:effectLst/>
+        </p:spPr>
+        <p:style>
+          <a:lnRef idx="1">
+            <a:schemeClr val="accent1"/>
+          </a:lnRef>
+          <a:fillRef idx="3">
+            <a:schemeClr val="accent1"/>
+          </a:fillRef>
+          <a:effectRef idx="2">
+            <a:schemeClr val="accent1"/>
+          </a:effectRef>
+          <a:fontRef idx="minor">
+            <a:schemeClr val="lt1"/>
+          </a:fontRef>
+        </p:style>
+        <p:txBody>
+          <a:bodyPr rtlCol="0" anchor="ctr"/>
+          <a:lstStyle/>
+          <a:p>
+            <a:pPr algn="ctr"/>
+          </a:p>
+        </p:txBody>
+      </p:sp>
+      <p:sp>
+        <p:nvSpPr>
+          <p:cNvPr id="29" name="TextBox 28"/>
+          <p:cNvSpPr txBox="1"/>
+          <p:nvPr/>
+        </p:nvSpPr>
+        <p:spPr>
+          <a:xfrm>
+            <a:off x="8321040" y="1170432"/>
+            <a:ext cx="1554480" cy="384048"/>
+          </a:xfrm>
+          <a:prstGeom prst="rect">
+            <a:avLst/>
+          </a:prstGeom>
+          <a:noFill/>
+        </p:spPr>
+        <p:txBody>
+          <a:bodyPr wrap="square" anchor="ctr" lIns="73152" rIns="73152" tIns="27432" bIns="27432">
+            <a:spAutoFit/>
+          </a:bodyPr>
+          <a:lstStyle/>
+          <a:p>
+            <a:pPr algn="ctr"/>
+            <a:r>
+              <a:rPr sz="1600" b="1">
+                <a:solidFill>
+                  <a:srgbClr val="1E8A82"/>
+                </a:solidFill>
+                <a:latin typeface="Noto Sans CJK JP"/>
+                <a:ea typeface="Noto Sans CJK JP"/>
+              </a:rPr>
+              <a:t>アイソレート2</a:t>
+            </a:r>
+          </a:p>
+        </p:txBody>
+      </p:sp>
+      <p:sp>
+        <p:nvSpPr>
+          <p:cNvPr id="30" name="Rounded Rectangle 29"/>
+          <p:cNvSpPr/>
+          <p:nvPr/>
+        </p:nvSpPr>
+        <p:spPr>
+          <a:xfrm>
+            <a:off x="8412480" y="1600200"/>
+            <a:ext cx="1371600" cy="548640"/>
+          </a:xfrm>
+          <a:prstGeom prst="roundRect">
+            <a:avLst>
+              <a:gd name="adj" fmla="val 20000"/>
             </a:avLst>
           </a:prstGeom>
           <a:solidFill>
@@ -6199,45 +6789,170 @@
           <a:p>
             <a:pPr algn="ctr"/>
             <a:r>
-              <a:rPr sz="1600" b="1">
+              <a:rPr sz="1500" b="1">
                 <a:solidFill>
                   <a:srgbClr val="1F3A5C"/>
                 </a:solidFill>
                 <a:latin typeface="Noto Sans CJK JP"/>
                 <a:ea typeface="Noto Sans CJK JP"/>
               </a:rPr>
-              <a:t>コード2</a:t>
-            </a:r>
-          </a:p>
-          <a:p>
-            <a:pPr algn="ctr"/>
-            <a:r>
-              <a:rPr sz="1500" b="0">
-                <a:solidFill>
-                  <a:srgbClr val="6B7280"/>
+              <a:t>コード</a:t>
+            </a:r>
+          </a:p>
+        </p:txBody>
+      </p:sp>
+      <p:sp>
+        <p:nvSpPr>
+          <p:cNvPr id="31" name="Rounded Rectangle 30"/>
+          <p:cNvSpPr/>
+          <p:nvPr/>
+        </p:nvSpPr>
+        <p:spPr>
+          <a:xfrm>
+            <a:off x="8412480" y="2240280"/>
+            <a:ext cx="1371600" cy="548640"/>
+          </a:xfrm>
+          <a:prstGeom prst="roundRect">
+            <a:avLst>
+              <a:gd name="adj" fmla="val 20000"/>
+            </a:avLst>
+          </a:prstGeom>
+          <a:solidFill>
+            <a:srgbClr val="C9E8E4"/>
+          </a:solidFill>
+          <a:ln>
+            <a:noFill/>
+          </a:ln>
+          <a:effectLst/>
+        </p:spPr>
+        <p:style>
+          <a:lnRef idx="1">
+            <a:schemeClr val="accent1"/>
+          </a:lnRef>
+          <a:fillRef idx="3">
+            <a:schemeClr val="accent1"/>
+          </a:fillRef>
+          <a:effectRef idx="2">
+            <a:schemeClr val="accent1"/>
+          </a:effectRef>
+          <a:fontRef idx="minor">
+            <a:schemeClr val="lt1"/>
+          </a:fontRef>
+        </p:style>
+        <p:txBody>
+          <a:bodyPr rtlCol="0" anchor="ctr" wrap="square" lIns="73152" rIns="73152" tIns="27432" bIns="27432"/>
+          <a:lstStyle/>
+          <a:p>
+            <a:pPr algn="ctr"/>
+            <a:r>
+              <a:rPr sz="1500" b="1">
+                <a:solidFill>
+                  <a:srgbClr val="1F3A5C"/>
                 </a:solidFill>
                 <a:latin typeface="Noto Sans CJK JP"/>
                 <a:ea typeface="Noto Sans CJK JP"/>
               </a:rPr>
-              <a:t>アイソレート</a:t>
-            </a:r>
-          </a:p>
-        </p:txBody>
-      </p:sp>
-      <p:sp>
-        <p:nvSpPr>
-          <p:cNvPr id="24" name="Rounded Rectangle 23"/>
+              <a:t>専用のヒープ</a:t>
+            </a:r>
+          </a:p>
+        </p:txBody>
+      </p:sp>
+      <p:sp>
+        <p:nvSpPr>
+          <p:cNvPr id="32" name="Rounded Rectangle 31"/>
           <p:cNvSpPr/>
           <p:nvPr/>
         </p:nvSpPr>
         <p:spPr>
           <a:xfrm>
-            <a:off x="10012680" y="1188720"/>
-            <a:ext cx="1508760" cy="1280160"/>
+            <a:off x="10012680" y="1143000"/>
+            <a:ext cx="1554480" cy="1828799"/>
           </a:xfrm>
           <a:prstGeom prst="roundRect">
             <a:avLst>
-              <a:gd name="adj" fmla="val 16000"/>
+              <a:gd name="adj" fmla="val 8000"/>
+            </a:avLst>
+          </a:prstGeom>
+          <a:noFill/>
+          <a:ln w="17780">
+            <a:solidFill>
+              <a:srgbClr val="1E8A82"/>
+            </a:solidFill>
+          </a:ln>
+          <a:effectLst/>
+        </p:spPr>
+        <p:style>
+          <a:lnRef idx="1">
+            <a:schemeClr val="accent1"/>
+          </a:lnRef>
+          <a:fillRef idx="3">
+            <a:schemeClr val="accent1"/>
+          </a:fillRef>
+          <a:effectRef idx="2">
+            <a:schemeClr val="accent1"/>
+          </a:effectRef>
+          <a:fontRef idx="minor">
+            <a:schemeClr val="lt1"/>
+          </a:fontRef>
+        </p:style>
+        <p:txBody>
+          <a:bodyPr rtlCol="0" anchor="ctr"/>
+          <a:lstStyle/>
+          <a:p>
+            <a:pPr algn="ctr"/>
+          </a:p>
+        </p:txBody>
+      </p:sp>
+      <p:sp>
+        <p:nvSpPr>
+          <p:cNvPr id="33" name="TextBox 32"/>
+          <p:cNvSpPr txBox="1"/>
+          <p:nvPr/>
+        </p:nvSpPr>
+        <p:spPr>
+          <a:xfrm>
+            <a:off x="10012680" y="1170432"/>
+            <a:ext cx="1554480" cy="384048"/>
+          </a:xfrm>
+          <a:prstGeom prst="rect">
+            <a:avLst/>
+          </a:prstGeom>
+          <a:noFill/>
+        </p:spPr>
+        <p:txBody>
+          <a:bodyPr wrap="square" anchor="ctr" lIns="73152" rIns="73152" tIns="27432" bIns="27432">
+            <a:spAutoFit/>
+          </a:bodyPr>
+          <a:lstStyle/>
+          <a:p>
+            <a:pPr algn="ctr"/>
+            <a:r>
+              <a:rPr sz="1600" b="1">
+                <a:solidFill>
+                  <a:srgbClr val="1E8A82"/>
+                </a:solidFill>
+                <a:latin typeface="Noto Sans CJK JP"/>
+                <a:ea typeface="Noto Sans CJK JP"/>
+              </a:rPr>
+              <a:t>アイソレート3</a:t>
+            </a:r>
+          </a:p>
+        </p:txBody>
+      </p:sp>
+      <p:sp>
+        <p:nvSpPr>
+          <p:cNvPr id="34" name="Rounded Rectangle 33"/>
+          <p:cNvSpPr/>
+          <p:nvPr/>
+        </p:nvSpPr>
+        <p:spPr>
+          <a:xfrm>
+            <a:off x="10104119" y="1600200"/>
+            <a:ext cx="1371600" cy="548640"/>
+          </a:xfrm>
+          <a:prstGeom prst="roundRect">
+            <a:avLst>
+              <a:gd name="adj" fmla="val 20000"/>
             </a:avLst>
           </a:prstGeom>
           <a:solidFill>
@@ -6270,41 +6985,84 @@
           <a:p>
             <a:pPr algn="ctr"/>
             <a:r>
-              <a:rPr sz="1600" b="1">
+              <a:rPr sz="1500" b="1">
                 <a:solidFill>
                   <a:srgbClr val="1F3A5C"/>
                 </a:solidFill>
                 <a:latin typeface="Noto Sans CJK JP"/>
                 <a:ea typeface="Noto Sans CJK JP"/>
               </a:rPr>
-              <a:t>コード3</a:t>
-            </a:r>
-          </a:p>
-          <a:p>
-            <a:pPr algn="ctr"/>
-            <a:r>
-              <a:rPr sz="1500" b="0">
-                <a:solidFill>
-                  <a:srgbClr val="6B7280"/>
+              <a:t>コード</a:t>
+            </a:r>
+          </a:p>
+        </p:txBody>
+      </p:sp>
+      <p:sp>
+        <p:nvSpPr>
+          <p:cNvPr id="35" name="Rounded Rectangle 34"/>
+          <p:cNvSpPr/>
+          <p:nvPr/>
+        </p:nvSpPr>
+        <p:spPr>
+          <a:xfrm>
+            <a:off x="10104119" y="2240280"/>
+            <a:ext cx="1371600" cy="548640"/>
+          </a:xfrm>
+          <a:prstGeom prst="roundRect">
+            <a:avLst>
+              <a:gd name="adj" fmla="val 20000"/>
+            </a:avLst>
+          </a:prstGeom>
+          <a:solidFill>
+            <a:srgbClr val="C9E8E4"/>
+          </a:solidFill>
+          <a:ln>
+            <a:noFill/>
+          </a:ln>
+          <a:effectLst/>
+        </p:spPr>
+        <p:style>
+          <a:lnRef idx="1">
+            <a:schemeClr val="accent1"/>
+          </a:lnRef>
+          <a:fillRef idx="3">
+            <a:schemeClr val="accent1"/>
+          </a:fillRef>
+          <a:effectRef idx="2">
+            <a:schemeClr val="accent1"/>
+          </a:effectRef>
+          <a:fontRef idx="minor">
+            <a:schemeClr val="lt1"/>
+          </a:fontRef>
+        </p:style>
+        <p:txBody>
+          <a:bodyPr rtlCol="0" anchor="ctr" wrap="square" lIns="73152" rIns="73152" tIns="27432" bIns="27432"/>
+          <a:lstStyle/>
+          <a:p>
+            <a:pPr algn="ctr"/>
+            <a:r>
+              <a:rPr sz="1500" b="1">
+                <a:solidFill>
+                  <a:srgbClr val="1F3A5C"/>
                 </a:solidFill>
                 <a:latin typeface="Noto Sans CJK JP"/>
                 <a:ea typeface="Noto Sans CJK JP"/>
               </a:rPr>
-              <a:t>アイソレート</a:t>
-            </a:r>
-          </a:p>
-        </p:txBody>
-      </p:sp>
-      <p:sp>
-        <p:nvSpPr>
-          <p:cNvPr id="25" name="Rounded Rectangle 24"/>
+              <a:t>専用のヒープ</a:t>
+            </a:r>
+          </a:p>
+        </p:txBody>
+      </p:sp>
+      <p:sp>
+        <p:nvSpPr>
+          <p:cNvPr id="36" name="Rounded Rectangle 35"/>
           <p:cNvSpPr/>
           <p:nvPr/>
         </p:nvSpPr>
         <p:spPr>
           <a:xfrm>
-            <a:off x="6629400" y="2606040"/>
-            <a:ext cx="4846320" cy="685800"/>
+            <a:off x="6629400" y="3200400"/>
+            <a:ext cx="4937760" cy="502920"/>
           </a:xfrm>
           <a:prstGeom prst="roundRect">
             <a:avLst>
@@ -6339,28 +7097,196 @@
           <a:p>
             <a:pPr algn="ctr"/>
             <a:r>
-              <a:rPr sz="1800" b="1">
+              <a:rPr sz="1600" b="1">
                 <a:solidFill>
                   <a:srgbClr val="FFFFFF"/>
                 </a:solidFill>
                 <a:latin typeface="Noto Sans CJK JP"/>
                 <a:ea typeface="Noto Sans CJK JP"/>
               </a:rPr>
-              <a:t>ランタイム（1つを共有）</a:t>
-            </a:r>
-          </a:p>
-        </p:txBody>
-      </p:sp>
-      <p:sp>
-        <p:nvSpPr>
-          <p:cNvPr id="26" name="Rounded Rectangle 25"/>
+              <a:t>V8エンジン（V8サンドボックス）</a:t>
+            </a:r>
+          </a:p>
+        </p:txBody>
+      </p:sp>
+      <p:sp>
+        <p:nvSpPr>
+          <p:cNvPr id="37" name="Rounded Rectangle 36"/>
           <p:cNvSpPr/>
           <p:nvPr/>
         </p:nvSpPr>
         <p:spPr>
           <a:xfrm>
-            <a:off x="457200" y="5029200"/>
-            <a:ext cx="2606040" cy="1143000"/>
+            <a:off x="6629400" y="3794760"/>
+            <a:ext cx="4937760" cy="502920"/>
+          </a:xfrm>
+          <a:prstGeom prst="roundRect">
+            <a:avLst>
+              <a:gd name="adj" fmla="val 20000"/>
+            </a:avLst>
+          </a:prstGeom>
+          <a:solidFill>
+            <a:srgbClr val="1E8A82"/>
+          </a:solidFill>
+          <a:ln>
+            <a:noFill/>
+          </a:ln>
+          <a:effectLst/>
+        </p:spPr>
+        <p:style>
+          <a:lnRef idx="1">
+            <a:schemeClr val="accent1"/>
+          </a:lnRef>
+          <a:fillRef idx="3">
+            <a:schemeClr val="accent1"/>
+          </a:fillRef>
+          <a:effectRef idx="2">
+            <a:schemeClr val="accent1"/>
+          </a:effectRef>
+          <a:fontRef idx="minor">
+            <a:schemeClr val="lt1"/>
+          </a:fontRef>
+        </p:style>
+        <p:txBody>
+          <a:bodyPr rtlCol="0" anchor="ctr" wrap="square" lIns="73152" rIns="73152" tIns="27432" bIns="27432"/>
+          <a:lstStyle/>
+          <a:p>
+            <a:pPr algn="ctr"/>
+            <a:r>
+              <a:rPr sz="1600" b="1">
+                <a:solidFill>
+                  <a:srgbClr val="FFFFFF"/>
+                </a:solidFill>
+                <a:latin typeface="Noto Sans CJK JP"/>
+                <a:ea typeface="Noto Sans CJK JP"/>
+              </a:rPr>
+              <a:t>Workersのランタイム（workerd）</a:t>
+            </a:r>
+          </a:p>
+        </p:txBody>
+      </p:sp>
+      <p:sp>
+        <p:nvSpPr>
+          <p:cNvPr id="38" name="Rounded Rectangle 37"/>
+          <p:cNvSpPr/>
+          <p:nvPr/>
+        </p:nvSpPr>
+        <p:spPr>
+          <a:xfrm>
+            <a:off x="6629400" y="4389120"/>
+            <a:ext cx="4937760" cy="502920"/>
+          </a:xfrm>
+          <a:prstGeom prst="roundRect">
+            <a:avLst>
+              <a:gd name="adj" fmla="val 20000"/>
+            </a:avLst>
+          </a:prstGeom>
+          <a:solidFill>
+            <a:srgbClr val="E5E7EB"/>
+          </a:solidFill>
+          <a:ln>
+            <a:noFill/>
+          </a:ln>
+          <a:effectLst/>
+        </p:spPr>
+        <p:style>
+          <a:lnRef idx="1">
+            <a:schemeClr val="accent1"/>
+          </a:lnRef>
+          <a:fillRef idx="3">
+            <a:schemeClr val="accent1"/>
+          </a:fillRef>
+          <a:effectRef idx="2">
+            <a:schemeClr val="accent1"/>
+          </a:effectRef>
+          <a:fontRef idx="minor">
+            <a:schemeClr val="lt1"/>
+          </a:fontRef>
+        </p:style>
+        <p:txBody>
+          <a:bodyPr rtlCol="0" anchor="ctr" wrap="square" lIns="73152" rIns="73152" tIns="27432" bIns="27432"/>
+          <a:lstStyle/>
+          <a:p>
+            <a:pPr algn="ctr"/>
+            <a:r>
+              <a:rPr sz="1600" b="1">
+                <a:solidFill>
+                  <a:srgbClr val="1F3A5C"/>
+                </a:solidFill>
+                <a:latin typeface="Noto Sans CJK JP"/>
+                <a:ea typeface="Noto Sans CJK JP"/>
+              </a:rPr>
+              <a:t>ホストOS（Linuxカーネル）</a:t>
+            </a:r>
+          </a:p>
+        </p:txBody>
+      </p:sp>
+      <p:sp>
+        <p:nvSpPr>
+          <p:cNvPr id="39" name="Rounded Rectangle 38"/>
+          <p:cNvSpPr/>
+          <p:nvPr/>
+        </p:nvSpPr>
+        <p:spPr>
+          <a:xfrm>
+            <a:off x="6629400" y="4983480"/>
+            <a:ext cx="4937760" cy="502920"/>
+          </a:xfrm>
+          <a:prstGeom prst="roundRect">
+            <a:avLst>
+              <a:gd name="adj" fmla="val 20000"/>
+            </a:avLst>
+          </a:prstGeom>
+          <a:solidFill>
+            <a:srgbClr val="E5E7EB"/>
+          </a:solidFill>
+          <a:ln>
+            <a:noFill/>
+          </a:ln>
+          <a:effectLst/>
+        </p:spPr>
+        <p:style>
+          <a:lnRef idx="1">
+            <a:schemeClr val="accent1"/>
+          </a:lnRef>
+          <a:fillRef idx="3">
+            <a:schemeClr val="accent1"/>
+          </a:fillRef>
+          <a:effectRef idx="2">
+            <a:schemeClr val="accent1"/>
+          </a:effectRef>
+          <a:fontRef idx="minor">
+            <a:schemeClr val="lt1"/>
+          </a:fontRef>
+        </p:style>
+        <p:txBody>
+          <a:bodyPr rtlCol="0" anchor="ctr" wrap="square" lIns="73152" rIns="73152" tIns="27432" bIns="27432"/>
+          <a:lstStyle/>
+          <a:p>
+            <a:pPr algn="ctr"/>
+            <a:r>
+              <a:rPr sz="1600" b="1">
+                <a:solidFill>
+                  <a:srgbClr val="1F3A5C"/>
+                </a:solidFill>
+                <a:latin typeface="Noto Sans CJK JP"/>
+                <a:ea typeface="Noto Sans CJK JP"/>
+              </a:rPr>
+              <a:t>ハードウェア</a:t>
+            </a:r>
+          </a:p>
+        </p:txBody>
+      </p:sp>
+      <p:sp>
+        <p:nvSpPr>
+          <p:cNvPr id="40" name="Rounded Rectangle 39"/>
+          <p:cNvSpPr/>
+          <p:nvPr/>
+        </p:nvSpPr>
+        <p:spPr>
+          <a:xfrm>
+            <a:off x="365760" y="5943600"/>
+            <a:ext cx="2651760" cy="960120"/>
           </a:xfrm>
           <a:prstGeom prst="roundRect">
             <a:avLst>
@@ -6424,14 +7350,14 @@
       </p:sp>
       <p:sp>
         <p:nvSpPr>
-          <p:cNvPr id="27" name="Rounded Rectangle 26"/>
+          <p:cNvPr id="41" name="Rounded Rectangle 40"/>
           <p:cNvSpPr/>
           <p:nvPr/>
         </p:nvSpPr>
         <p:spPr>
           <a:xfrm>
-            <a:off x="3246120" y="5029200"/>
-            <a:ext cx="2606040" cy="1143000"/>
+            <a:off x="3200400" y="5943600"/>
+            <a:ext cx="2651760" cy="960120"/>
           </a:xfrm>
           <a:prstGeom prst="roundRect">
             <a:avLst>
@@ -6495,14 +7421,14 @@
       </p:sp>
       <p:sp>
         <p:nvSpPr>
-          <p:cNvPr id="28" name="Rounded Rectangle 27"/>
+          <p:cNvPr id="42" name="Rounded Rectangle 41"/>
           <p:cNvSpPr/>
           <p:nvPr/>
         </p:nvSpPr>
         <p:spPr>
           <a:xfrm>
-            <a:off x="6355080" y="5029200"/>
-            <a:ext cx="2606040" cy="1143000"/>
+            <a:off x="6355080" y="5943600"/>
+            <a:ext cx="2651760" cy="960120"/>
           </a:xfrm>
           <a:prstGeom prst="roundRect">
             <a:avLst>
@@ -6566,14 +7492,14 @@
       </p:sp>
       <p:sp>
         <p:nvSpPr>
-          <p:cNvPr id="29" name="Rounded Rectangle 28"/>
+          <p:cNvPr id="43" name="Rounded Rectangle 42"/>
           <p:cNvSpPr/>
           <p:nvPr/>
         </p:nvSpPr>
         <p:spPr>
           <a:xfrm>
-            <a:off x="9144000" y="5029200"/>
-            <a:ext cx="2606040" cy="1143000"/>
+            <a:off x="9189720" y="5943600"/>
+            <a:ext cx="2651760" cy="960120"/>
           </a:xfrm>
           <a:prstGeom prst="roundRect">
             <a:avLst>
@@ -6631,6 +7557,122 @@
                 <a:ea typeface="Noto Sans CJK JP"/>
               </a:rPr>
               <a:t>動かすのに要るメモリ</a:t>
+            </a:r>
+          </a:p>
+        </p:txBody>
+      </p:sp>
+      <p:sp>
+        <p:nvSpPr>
+          <p:cNvPr id="44" name="Rounded Rectangle 43"/>
+          <p:cNvSpPr/>
+          <p:nvPr/>
+        </p:nvSpPr>
+        <p:spPr>
+          <a:xfrm>
+            <a:off x="365760" y="7040880"/>
+            <a:ext cx="5486400" cy="548640"/>
+          </a:xfrm>
+          <a:prstGeom prst="roundRect">
+            <a:avLst>
+              <a:gd name="adj" fmla="val 16000"/>
+            </a:avLst>
+          </a:prstGeom>
+          <a:solidFill>
+            <a:srgbClr val="FFFFFF"/>
+          </a:solidFill>
+          <a:ln w="17780">
+            <a:solidFill>
+              <a:srgbClr val="2E5E8E"/>
+            </a:solidFill>
+          </a:ln>
+          <a:effectLst/>
+        </p:spPr>
+        <p:style>
+          <a:lnRef idx="1">
+            <a:schemeClr val="accent1"/>
+          </a:lnRef>
+          <a:fillRef idx="3">
+            <a:schemeClr val="accent1"/>
+          </a:fillRef>
+          <a:effectRef idx="2">
+            <a:schemeClr val="accent1"/>
+          </a:effectRef>
+          <a:fontRef idx="minor">
+            <a:schemeClr val="lt1"/>
+          </a:fontRef>
+        </p:style>
+        <p:txBody>
+          <a:bodyPr rtlCol="0" anchor="ctr" wrap="square" lIns="73152" rIns="73152" tIns="27432" bIns="27432"/>
+          <a:lstStyle/>
+          <a:p>
+            <a:pPr algn="ctr"/>
+            <a:r>
+              <a:rPr sz="1600" b="1">
+                <a:solidFill>
+                  <a:srgbClr val="2E5E8E"/>
+                </a:solidFill>
+                <a:latin typeface="Noto Sans CJK JP"/>
+                <a:ea typeface="Noto Sans CJK JP"/>
+              </a:rPr>
+              <a:t>隔離：カーネルの名前空間・cgroups</a:t>
+            </a:r>
+          </a:p>
+        </p:txBody>
+      </p:sp>
+      <p:sp>
+        <p:nvSpPr>
+          <p:cNvPr id="45" name="Rounded Rectangle 44"/>
+          <p:cNvSpPr/>
+          <p:nvPr/>
+        </p:nvSpPr>
+        <p:spPr>
+          <a:xfrm>
+            <a:off x="6355080" y="7040880"/>
+            <a:ext cx="5486400" cy="548640"/>
+          </a:xfrm>
+          <a:prstGeom prst="roundRect">
+            <a:avLst>
+              <a:gd name="adj" fmla="val 16000"/>
+            </a:avLst>
+          </a:prstGeom>
+          <a:solidFill>
+            <a:srgbClr val="FFFFFF"/>
+          </a:solidFill>
+          <a:ln w="17780">
+            <a:solidFill>
+              <a:srgbClr val="1E8A82"/>
+            </a:solidFill>
+          </a:ln>
+          <a:effectLst/>
+        </p:spPr>
+        <p:style>
+          <a:lnRef idx="1">
+            <a:schemeClr val="accent1"/>
+          </a:lnRef>
+          <a:fillRef idx="3">
+            <a:schemeClr val="accent1"/>
+          </a:fillRef>
+          <a:effectRef idx="2">
+            <a:schemeClr val="accent1"/>
+          </a:effectRef>
+          <a:fontRef idx="minor">
+            <a:schemeClr val="lt1"/>
+          </a:fontRef>
+        </p:style>
+        <p:txBody>
+          <a:bodyPr rtlCol="0" anchor="ctr" wrap="square" lIns="73152" rIns="73152" tIns="27432" bIns="27432"/>
+          <a:lstStyle/>
+          <a:p>
+            <a:pPr algn="ctr"/>
+            <a:r>
+              <a:rPr sz="1600" b="1">
+                <a:solidFill>
+                  <a:srgbClr val="1E8A82"/>
+                </a:solidFill>
+                <a:latin typeface="Noto Sans CJK JP"/>
+                <a:ea typeface="Noto Sans CJK JP"/>
+              </a:rPr>
+              <a:t>隔離：V8サンドボックス＋2層目のサンドボックス</a:t>
             </a:r>
           </a:p>
         </p:txBody>
